--- a/presentation/RDMU_Learning_Path_Recommender.pptx
+++ b/presentation/RDMU_Learning_Path_Recommender.pptx
@@ -1141,7 +1141,7 @@
           <a:lstStyle/>
           <a:p>
             <a:r>
-              <a:t>Yes — measured with precisely-defined metrics, not a vague accuracy. Mean episodic reward rose from 2.36 (early, exploratory) to 9.82 (converged) — a clear learning curve produced by a deliberately tight 22-step budget that forces efficiency. The greedy policy reaches the objective on 97.3% of paths, and 98.6% of states have a stable greedy action across the last checkpoints. Recommendation Accuracy — our stated RL-vs-MCDM agreement proxy — is 48%, the point being that MCDM genuinely re-ranks about half the time, so the instructor's weights matter. Mastery rate is a balanced 52%.</a:t>
+              <a:t>Yes — measured with precisely-defined metrics, not a vague accuracy. Mean episodic reward rose from 1.54 (early, exploratory) to 8.49 (converged) — a clear learning curve produced by a deliberately tight 22-step budget that forces efficiency. The greedy policy reaches the objective on ~92% of paths, and ~98% of states have a stable greedy action across the last checkpoints. Recommendation Accuracy — our stated RL-vs-MCDM agreement proxy — is ~51%, the point being that MCDM genuinely re-ranks about half the time, so the instructor's weights matter. Mastery rate (students past 50% of the curriculum) is about 31%.</a:t>
             </a:r>
           </a:p>
         </p:txBody>
@@ -8193,7 +8193,7 @@
                 </a:solidFill>
                 <a:latin typeface="Segoe UI"/>
               </a:rPr>
-              <a:t>2.36 → 9.82</a:t>
+              <a:t>1.54 → 8.49</a:t>
             </a:r>
           </a:p>
         </p:txBody>
@@ -8264,7 +8264,7 @@
                 </a:solidFill>
                 <a:latin typeface="Segoe UI"/>
               </a:rPr>
-              <a:t>97.3%</a:t>
+              <a:t>92%</a:t>
             </a:r>
           </a:p>
         </p:txBody>
@@ -8335,7 +8335,7 @@
                 </a:solidFill>
                 <a:latin typeface="Segoe UI"/>
               </a:rPr>
-              <a:t>98.6%</a:t>
+              <a:t>98%</a:t>
             </a:r>
           </a:p>
         </p:txBody>
@@ -8390,7 +8390,7 @@
                 </a:solidFill>
                 <a:latin typeface="Segoe UI"/>
               </a:rPr>
-              <a:t>MASTERY RATE (≥ PROFICIENT)</a:t>
+              <a:t>MASTERY RATE (≥50% CONCEPTS)</a:t>
             </a:r>
           </a:p>
           <a:p>
@@ -8406,7 +8406,7 @@
                 </a:solidFill>
                 <a:latin typeface="Segoe UI"/>
               </a:rPr>
-              <a:t>52%</a:t>
+              <a:t>31%</a:t>
             </a:r>
           </a:p>
         </p:txBody>
@@ -8477,7 +8477,7 @@
                 </a:solidFill>
                 <a:latin typeface="Segoe UI"/>
               </a:rPr>
-              <a:t>48%</a:t>
+              <a:t>51%</a:t>
             </a:r>
           </a:p>
         </p:txBody>

--- a/presentation/RDMU_Learning_Path_Recommender.pptx
+++ b/presentation/RDMU_Learning_Path_Recommender.pptx
@@ -4,19 +4,22 @@
   <p:sldMasterIdLst>
     <p:sldMasterId id="2147483648" r:id="rId1"/>
   </p:sldMasterIdLst>
+  <p:notesMasterIdLst>
+    <p:notesMasterId r:id="rId12"/>
+  </p:notesMasterIdLst>
   <p:sldIdLst>
-    <p:sldId id="256" r:id="rId7"/>
-    <p:sldId id="257" r:id="rId9"/>
-    <p:sldId id="258" r:id="rId10"/>
-    <p:sldId id="259" r:id="rId11"/>
-    <p:sldId id="260" r:id="rId12"/>
-    <p:sldId id="261" r:id="rId13"/>
-    <p:sldId id="262" r:id="rId14"/>
-    <p:sldId id="263" r:id="rId15"/>
-    <p:sldId id="264" r:id="rId16"/>
-    <p:sldId id="265" r:id="rId17"/>
+    <p:sldId id="256" r:id="rId2"/>
+    <p:sldId id="257" r:id="rId3"/>
+    <p:sldId id="258" r:id="rId4"/>
+    <p:sldId id="259" r:id="rId5"/>
+    <p:sldId id="260" r:id="rId6"/>
+    <p:sldId id="261" r:id="rId7"/>
+    <p:sldId id="262" r:id="rId8"/>
+    <p:sldId id="263" r:id="rId9"/>
+    <p:sldId id="264" r:id="rId10"/>
+    <p:sldId id="265" r:id="rId11"/>
   </p:sldIdLst>
-  <p:sldSz cx="12192000" cy="6858000" type="screen4x3"/>
+  <p:sldSz cx="12192000" cy="6858000"/>
   <p:notesSz cx="6858000" cy="9144000"/>
   <p:defaultTextStyle>
     <a:defPPr>
@@ -113,11 +116,27 @@
       </a:defRPr>
     </a:lvl9pPr>
   </p:defaultTextStyle>
+  <p:extLst>
+    <p:ext uri="{EFAFB233-063F-42B5-8137-9DF3F51BA10A}">
+      <p15:sldGuideLst xmlns:p15="http://schemas.microsoft.com/office/powerpoint/2012/main">
+        <p15:guide id="1" orient="horz" pos="2160">
+          <p15:clr>
+            <a:srgbClr val="A4A3A4"/>
+          </p15:clr>
+        </p15:guide>
+        <p15:guide id="2" pos="2880">
+          <p15:clr>
+            <a:srgbClr val="A4A3A4"/>
+          </p15:clr>
+        </p15:guide>
+      </p15:sldGuideLst>
+    </p:ext>
+  </p:extLst>
 </p:presentation>
 </file>
 
 <file path=ppt/notesMasters/notesMaster1.xml><?xml version="1.0" encoding="utf-8"?>
-<p:notesMaster xmlns:a="http://schemas.openxmlformats.org/drawingml/2006/main" xmlns:p="http://schemas.openxmlformats.org/presentationml/2006/main" xmlns:r="http://schemas.openxmlformats.org/officeDocument/2006/relationships">
+<p:notesMaster xmlns:a="http://schemas.openxmlformats.org/drawingml/2006/main" xmlns:r="http://schemas.openxmlformats.org/officeDocument/2006/relationships" xmlns:p="http://schemas.openxmlformats.org/presentationml/2006/main">
   <p:cSld>
     <p:bg>
       <p:bgRef idx="1001">
@@ -138,241 +157,16 @@
           <a:chExt cx="0" cy="0"/>
         </a:xfrm>
       </p:grpSpPr>
-      <p:sp>
-        <p:nvSpPr>
-          <p:cNvPr id="2" name="Header Placeholder 1"/>
-          <p:cNvSpPr>
-            <a:spLocks noGrp="1"/>
-          </p:cNvSpPr>
-          <p:nvPr>
-            <p:ph type="hdr" sz="quarter"/>
-          </p:nvPr>
-        </p:nvSpPr>
-        <p:spPr>
-          <a:xfrm>
-            <a:off x="0" y="0"/>
-            <a:ext cx="2971800" cy="457200"/>
-          </a:xfrm>
-          <a:prstGeom prst="rect">
-            <a:avLst/>
-          </a:prstGeom>
-        </p:spPr>
-        <p:txBody>
-          <a:bodyPr vert="horz" lIns="91440" tIns="45720" rIns="91440" bIns="45720" rtlCol="0"/>
-          <a:lstStyle>
-            <a:lvl1pPr algn="l">
-              <a:defRPr sz="1200"/>
-            </a:lvl1pPr>
-          </a:lstStyle>
-          <a:p>
-            <a:endParaRPr lang="en-US"/>
-          </a:p>
-        </p:txBody>
-      </p:sp>
-      <p:sp>
-        <p:nvSpPr>
-          <p:cNvPr id="3" name="Date Placeholder 2"/>
-          <p:cNvSpPr>
-            <a:spLocks noGrp="1"/>
-          </p:cNvSpPr>
-          <p:nvPr>
-            <p:ph type="dt" idx="1"/>
-          </p:nvPr>
-        </p:nvSpPr>
-        <p:spPr>
-          <a:xfrm>
-            <a:off x="3884613" y="0"/>
-            <a:ext cx="2971800" cy="457200"/>
-          </a:xfrm>
-          <a:prstGeom prst="rect">
-            <a:avLst/>
-          </a:prstGeom>
-        </p:spPr>
-        <p:txBody>
-          <a:bodyPr vert="horz" lIns="91440" tIns="45720" rIns="91440" bIns="45720" rtlCol="0"/>
-          <a:lstStyle>
-            <a:lvl1pPr algn="r">
-              <a:defRPr sz="1200"/>
-            </a:lvl1pPr>
-          </a:lstStyle>
-          <a:p>
-            <a:fld id="{0F89C1C7-3DCD-1040-A9CF-14679D8B5DDD}" type="datetimeFigureOut">
-              <a:rPr lang="en-US" smtClean="0"/>
-              <a:t>10/17/16</a:t>
-            </a:fld>
-            <a:endParaRPr lang="en-US"/>
-          </a:p>
-        </p:txBody>
-      </p:sp>
-      <p:sp>
-        <p:nvSpPr>
-          <p:cNvPr id="4" name="Slide Image Placeholder 3"/>
-          <p:cNvSpPr>
-            <a:spLocks noGrp="1" noRot="1" noChangeAspect="1"/>
-          </p:cNvSpPr>
-          <p:nvPr>
-            <p:ph type="sldImg" idx="2"/>
-          </p:nvPr>
-        </p:nvSpPr>
-        <p:spPr>
-          <a:xfrm>
-            <a:off x="1143000" y="685800"/>
-            <a:ext cx="4572000" cy="3429000"/>
-          </a:xfrm>
-          <a:prstGeom prst="rect">
-            <a:avLst/>
-          </a:prstGeom>
-          <a:noFill/>
-          <a:ln w="12700">
-            <a:solidFill>
-              <a:prstClr val="black"/>
-            </a:solidFill>
-          </a:ln>
-        </p:spPr>
-        <p:txBody>
-          <a:bodyPr vert="horz" lIns="91440" tIns="45720" rIns="91440" bIns="45720" rtlCol="0" anchor="ctr"/>
-          <a:lstStyle/>
-          <a:p>
-            <a:endParaRPr lang="en-US"/>
-          </a:p>
-        </p:txBody>
-      </p:sp>
-      <p:sp>
-        <p:nvSpPr>
-          <p:cNvPr id="5" name="Notes Placeholder 4"/>
-          <p:cNvSpPr>
-            <a:spLocks noGrp="1"/>
-          </p:cNvSpPr>
-          <p:nvPr>
-            <p:ph type="body" sz="quarter" idx="3"/>
-          </p:nvPr>
-        </p:nvSpPr>
-        <p:spPr>
-          <a:xfrm>
-            <a:off x="685800" y="4343400"/>
-            <a:ext cx="5486400" cy="4114800"/>
-          </a:xfrm>
-          <a:prstGeom prst="rect">
-            <a:avLst/>
-          </a:prstGeom>
-        </p:spPr>
-        <p:txBody>
-          <a:bodyPr vert="horz" lIns="91440" tIns="45720" rIns="91440" bIns="45720" rtlCol="0"/>
-          <a:lstStyle/>
-          <a:p>
-            <a:pPr lvl="0"/>
-            <a:r>
-              <a:rPr lang="en-US" smtClean="0"/>
-              <a:t>Click to edit Master text styles</a:t>
-            </a:r>
-          </a:p>
-          <a:p>
-            <a:pPr lvl="1"/>
-            <a:r>
-              <a:rPr lang="en-US" smtClean="0"/>
-              <a:t>Second level</a:t>
-            </a:r>
-          </a:p>
-          <a:p>
-            <a:pPr lvl="2"/>
-            <a:r>
-              <a:rPr lang="en-US" smtClean="0"/>
-              <a:t>Third level</a:t>
-            </a:r>
-          </a:p>
-          <a:p>
-            <a:pPr lvl="3"/>
-            <a:r>
-              <a:rPr lang="en-US" smtClean="0"/>
-              <a:t>Fourth level</a:t>
-            </a:r>
-          </a:p>
-          <a:p>
-            <a:pPr lvl="4"/>
-            <a:r>
-              <a:rPr lang="en-US" smtClean="0"/>
-              <a:t>Fifth level</a:t>
-            </a:r>
-            <a:endParaRPr lang="en-US"/>
-          </a:p>
-        </p:txBody>
-      </p:sp>
-      <p:sp>
-        <p:nvSpPr>
-          <p:cNvPr id="6" name="Footer Placeholder 5"/>
-          <p:cNvSpPr>
-            <a:spLocks noGrp="1"/>
-          </p:cNvSpPr>
-          <p:nvPr>
-            <p:ph type="ftr" sz="quarter" idx="4"/>
-          </p:nvPr>
-        </p:nvSpPr>
-        <p:spPr>
-          <a:xfrm>
-            <a:off x="0" y="8685213"/>
-            <a:ext cx="2971800" cy="457200"/>
-          </a:xfrm>
-          <a:prstGeom prst="rect">
-            <a:avLst/>
-          </a:prstGeom>
-        </p:spPr>
-        <p:txBody>
-          <a:bodyPr vert="horz" lIns="91440" tIns="45720" rIns="91440" bIns="45720" rtlCol="0" anchor="b"/>
-          <a:lstStyle>
-            <a:lvl1pPr algn="l">
-              <a:defRPr sz="1200"/>
-            </a:lvl1pPr>
-          </a:lstStyle>
-          <a:p>
-            <a:endParaRPr lang="en-US"/>
-          </a:p>
-        </p:txBody>
-      </p:sp>
-      <p:sp>
-        <p:nvSpPr>
-          <p:cNvPr id="7" name="Slide Number Placeholder 6"/>
-          <p:cNvSpPr>
-            <a:spLocks noGrp="1"/>
-          </p:cNvSpPr>
-          <p:nvPr>
-            <p:ph type="sldNum" sz="quarter" idx="5"/>
-          </p:nvPr>
-        </p:nvSpPr>
-        <p:spPr>
-          <a:xfrm>
-            <a:off x="3884613" y="8685213"/>
-            <a:ext cx="2971800" cy="457200"/>
-          </a:xfrm>
-          <a:prstGeom prst="rect">
-            <a:avLst/>
-          </a:prstGeom>
-        </p:spPr>
-        <p:txBody>
-          <a:bodyPr vert="horz" lIns="91440" tIns="45720" rIns="91440" bIns="45720" rtlCol="0" anchor="b"/>
-          <a:lstStyle>
-            <a:lvl1pPr algn="r">
-              <a:defRPr sz="1200"/>
-            </a:lvl1pPr>
-          </a:lstStyle>
-          <a:p>
-            <a:fld id="{BB5E49A5-4136-284D-997B-48E1D791AD67}" type="slidenum">
-              <a:rPr lang="en-US" smtClean="0"/>
-              <a:t>‹#›</a:t>
-            </a:fld>
-            <a:endParaRPr lang="en-US"/>
-          </a:p>
-        </p:txBody>
-      </p:sp>
     </p:spTree>
     <p:extLst>
       <p:ext uri="{BB962C8B-B14F-4D97-AF65-F5344CB8AC3E}">
-        <p14:creationId xmlns:p14="http://schemas.microsoft.com/office/powerpoint/2010/main" val="2623252185"/>
+        <p14:creationId xmlns:p14="http://schemas.microsoft.com/office/powerpoint/2010/main" val="2489861997"/>
       </p:ext>
     </p:extLst>
   </p:cSld>
   <p:clrMap bg1="lt1" tx1="dk1" bg2="lt2" tx2="dk2" accent1="accent1" accent2="accent2" accent3="accent3" accent4="accent4" accent5="accent5" accent6="accent6" hlink="hlink" folHlink="folHlink"/>
   <p:notesStyle>
-    <a:lvl1pPr marL="0" algn="l" defTabSz="457200" rtl="0" eaLnBrk="1" latinLnBrk="0" hangingPunct="1">
+    <a:lvl1pPr marL="0" algn="l" defTabSz="914400" rtl="0" eaLnBrk="1" latinLnBrk="0" hangingPunct="1">
       <a:defRPr sz="1200" kern="1200">
         <a:solidFill>
           <a:schemeClr val="tx1"/>
@@ -382,7 +176,7 @@
         <a:cs typeface="+mn-cs"/>
       </a:defRPr>
     </a:lvl1pPr>
-    <a:lvl2pPr marL="457200" algn="l" defTabSz="457200" rtl="0" eaLnBrk="1" latinLnBrk="0" hangingPunct="1">
+    <a:lvl2pPr marL="457200" algn="l" defTabSz="914400" rtl="0" eaLnBrk="1" latinLnBrk="0" hangingPunct="1">
       <a:defRPr sz="1200" kern="1200">
         <a:solidFill>
           <a:schemeClr val="tx1"/>
@@ -392,7 +186,7 @@
         <a:cs typeface="+mn-cs"/>
       </a:defRPr>
     </a:lvl2pPr>
-    <a:lvl3pPr marL="914400" algn="l" defTabSz="457200" rtl="0" eaLnBrk="1" latinLnBrk="0" hangingPunct="1">
+    <a:lvl3pPr marL="914400" algn="l" defTabSz="914400" rtl="0" eaLnBrk="1" latinLnBrk="0" hangingPunct="1">
       <a:defRPr sz="1200" kern="1200">
         <a:solidFill>
           <a:schemeClr val="tx1"/>
@@ -402,7 +196,7 @@
         <a:cs typeface="+mn-cs"/>
       </a:defRPr>
     </a:lvl3pPr>
-    <a:lvl4pPr marL="1371600" algn="l" defTabSz="457200" rtl="0" eaLnBrk="1" latinLnBrk="0" hangingPunct="1">
+    <a:lvl4pPr marL="1371600" algn="l" defTabSz="914400" rtl="0" eaLnBrk="1" latinLnBrk="0" hangingPunct="1">
       <a:defRPr sz="1200" kern="1200">
         <a:solidFill>
           <a:schemeClr val="tx1"/>
@@ -412,7 +206,7 @@
         <a:cs typeface="+mn-cs"/>
       </a:defRPr>
     </a:lvl4pPr>
-    <a:lvl5pPr marL="1828800" algn="l" defTabSz="457200" rtl="0" eaLnBrk="1" latinLnBrk="0" hangingPunct="1">
+    <a:lvl5pPr marL="1828800" algn="l" defTabSz="914400" rtl="0" eaLnBrk="1" latinLnBrk="0" hangingPunct="1">
       <a:defRPr sz="1200" kern="1200">
         <a:solidFill>
           <a:schemeClr val="tx1"/>
@@ -422,7 +216,7 @@
         <a:cs typeface="+mn-cs"/>
       </a:defRPr>
     </a:lvl5pPr>
-    <a:lvl6pPr marL="2286000" algn="l" defTabSz="457200" rtl="0" eaLnBrk="1" latinLnBrk="0" hangingPunct="1">
+    <a:lvl6pPr marL="2286000" algn="l" defTabSz="914400" rtl="0" eaLnBrk="1" latinLnBrk="0" hangingPunct="1">
       <a:defRPr sz="1200" kern="1200">
         <a:solidFill>
           <a:schemeClr val="tx1"/>
@@ -432,7 +226,7 @@
         <a:cs typeface="+mn-cs"/>
       </a:defRPr>
     </a:lvl6pPr>
-    <a:lvl7pPr marL="2743200" algn="l" defTabSz="457200" rtl="0" eaLnBrk="1" latinLnBrk="0" hangingPunct="1">
+    <a:lvl7pPr marL="2743200" algn="l" defTabSz="914400" rtl="0" eaLnBrk="1" latinLnBrk="0" hangingPunct="1">
       <a:defRPr sz="1200" kern="1200">
         <a:solidFill>
           <a:schemeClr val="tx1"/>
@@ -442,7 +236,7 @@
         <a:cs typeface="+mn-cs"/>
       </a:defRPr>
     </a:lvl7pPr>
-    <a:lvl8pPr marL="3200400" algn="l" defTabSz="457200" rtl="0" eaLnBrk="1" latinLnBrk="0" hangingPunct="1">
+    <a:lvl8pPr marL="3200400" algn="l" defTabSz="914400" rtl="0" eaLnBrk="1" latinLnBrk="0" hangingPunct="1">
       <a:defRPr sz="1200" kern="1200">
         <a:solidFill>
           <a:schemeClr val="tx1"/>
@@ -452,7 +246,7 @@
         <a:cs typeface="+mn-cs"/>
       </a:defRPr>
     </a:lvl8pPr>
-    <a:lvl9pPr marL="3657600" algn="l" defTabSz="457200" rtl="0" eaLnBrk="1" latinLnBrk="0" hangingPunct="1">
+    <a:lvl9pPr marL="3657600" algn="l" defTabSz="914400" rtl="0" eaLnBrk="1" latinLnBrk="0" hangingPunct="1">
       <a:defRPr sz="1200" kern="1200">
         <a:solidFill>
           <a:schemeClr val="tx1"/>
@@ -467,7 +261,7 @@
 </file>
 
 <file path=ppt/notesSlides/notesSlide1.xml><?xml version="1.0" encoding="utf-8"?>
-<p:notes xmlns:a="http://schemas.openxmlformats.org/drawingml/2006/main" xmlns:p="http://schemas.openxmlformats.org/presentationml/2006/main" xmlns:r="http://schemas.openxmlformats.org/officeDocument/2006/relationships">
+<p:notes xmlns:a="http://schemas.openxmlformats.org/drawingml/2006/main" xmlns:r="http://schemas.openxmlformats.org/officeDocument/2006/relationships" xmlns:p="http://schemas.openxmlformats.org/presentationml/2006/main">
   <p:cSld>
     <p:spTree>
       <p:nvGrpSpPr>
@@ -487,43 +281,43 @@
         <p:nvSpPr>
           <p:cNvPr id="2" name="Slide Image Placeholder 1"/>
           <p:cNvSpPr>
+            <a:spLocks noGrp="1" noRot="1" noChangeAspect="1"/>
+          </p:cNvSpPr>
+          <p:nvPr>
+            <p:ph type="sldImg" idx="2"/>
+          </p:nvPr>
+        </p:nvSpPr>
+        <p:spPr/>
+      </p:sp>
+      <p:sp>
+        <p:nvSpPr>
+          <p:cNvPr id="3" name="Notes Placeholder 2"/>
+          <p:cNvSpPr>
             <a:spLocks noGrp="1"/>
           </p:cNvSpPr>
           <p:nvPr>
-            <p:ph type="sldImg" idx="2"/>
+            <p:ph type="body" sz="quarter" idx="3"/>
           </p:nvPr>
         </p:nvSpPr>
         <p:spPr/>
-      </p:sp>
-      <p:sp>
-        <p:nvSpPr>
-          <p:cNvPr id="3" name="Notes Placeholder 2"/>
+        <p:txBody>
+          <a:bodyPr/>
+          <a:lstStyle/>
+          <a:p>
+            <a:r>
+              <a:t>This project answers a single, concrete question every adaptive tutor must solve: given where a learner is right now, which concept should they study next? We treat that decision as sequential — each choice changes the learner's state — and learn a policy with reinforcement learning, then let an instructor steer the final pick with transparent criteria weights. The whole system is reproducible (fixed seed 42) and ships as an 8-page dashboard.</a:t>
+            </a:r>
+          </a:p>
+        </p:txBody>
+      </p:sp>
+      <p:sp>
+        <p:nvSpPr>
+          <p:cNvPr id="4" name="Slide Number Placeholder 3"/>
           <p:cNvSpPr>
             <a:spLocks noGrp="1"/>
           </p:cNvSpPr>
           <p:nvPr>
-            <p:ph type="body" idx="3" sz="quarter"/>
-          </p:nvPr>
-        </p:nvSpPr>
-        <p:spPr/>
-        <p:txBody>
-          <a:bodyPr/>
-          <a:lstStyle/>
-          <a:p>
-            <a:r>
-              <a:t>This project answers a single, concrete question every adaptive tutor must solve: given where a learner is right now, which concept should they study next? We treat that decision as sequential — each choice changes the learner's state — and learn a policy with reinforcement learning, then let an instructor steer the final pick with transparent criteria weights. The whole system is reproducible (fixed seed 42) and ships as an 8-page dashboard.</a:t>
-            </a:r>
-          </a:p>
-        </p:txBody>
-      </p:sp>
-      <p:sp>
-        <p:nvSpPr>
-          <p:cNvPr id="4" name="Slide Number Placeholder 3"/>
-          <p:cNvSpPr>
-            <a:spLocks noGrp="1"/>
-          </p:cNvSpPr>
-          <p:nvPr>
-            <p:ph type="sldNum" idx="5" sz="quarter"/>
+            <p:ph type="sldNum" sz="quarter" idx="5"/>
           </p:nvPr>
         </p:nvSpPr>
         <p:spPr/>
@@ -537,7 +331,7 @@
 </file>
 
 <file path=ppt/notesSlides/notesSlide10.xml><?xml version="1.0" encoding="utf-8"?>
-<p:notes xmlns:a="http://schemas.openxmlformats.org/drawingml/2006/main" xmlns:p="http://schemas.openxmlformats.org/presentationml/2006/main" xmlns:r="http://schemas.openxmlformats.org/officeDocument/2006/relationships">
+<p:notes xmlns:a="http://schemas.openxmlformats.org/drawingml/2006/main" xmlns:r="http://schemas.openxmlformats.org/officeDocument/2006/relationships" xmlns:p="http://schemas.openxmlformats.org/presentationml/2006/main">
   <p:cSld>
     <p:spTree>
       <p:nvGrpSpPr>
@@ -557,43 +351,43 @@
         <p:nvSpPr>
           <p:cNvPr id="2" name="Slide Image Placeholder 1"/>
           <p:cNvSpPr>
+            <a:spLocks noGrp="1" noRot="1" noChangeAspect="1"/>
+          </p:cNvSpPr>
+          <p:nvPr>
+            <p:ph type="sldImg" idx="2"/>
+          </p:nvPr>
+        </p:nvSpPr>
+        <p:spPr/>
+      </p:sp>
+      <p:sp>
+        <p:nvSpPr>
+          <p:cNvPr id="3" name="Notes Placeholder 2"/>
+          <p:cNvSpPr>
             <a:spLocks noGrp="1"/>
           </p:cNvSpPr>
           <p:nvPr>
-            <p:ph type="sldImg" idx="2"/>
+            <p:ph type="body" sz="quarter" idx="3"/>
           </p:nvPr>
         </p:nvSpPr>
         <p:spPr/>
-      </p:sp>
-      <p:sp>
-        <p:nvSpPr>
-          <p:cNvPr id="3" name="Notes Placeholder 2"/>
+        <p:txBody>
+          <a:bodyPr/>
+          <a:lstStyle/>
+          <a:p>
+            <a:r>
+              <a:t>We delivered a reproducible, examination-grade prototype that uses exactly the four RDMU techniques to make an explainable, adaptive next-concept recommendation, end to end and fully runnable. The design keeps RL and human judgement (MCDM weights) cleanly separated and visible. Future scope: replace the tabular Q-table with function approximation to scale; calibrate on real learner telemetry; add A/B evaluation against a fixed-curriculum baseline; and extend MCDM to richer criteria. None of these change the core RDMU framing — they deepen each layer.</a:t>
+            </a:r>
+          </a:p>
+        </p:txBody>
+      </p:sp>
+      <p:sp>
+        <p:nvSpPr>
+          <p:cNvPr id="4" name="Slide Number Placeholder 3"/>
           <p:cNvSpPr>
             <a:spLocks noGrp="1"/>
           </p:cNvSpPr>
           <p:nvPr>
-            <p:ph type="body" idx="3" sz="quarter"/>
-          </p:nvPr>
-        </p:nvSpPr>
-        <p:spPr/>
-        <p:txBody>
-          <a:bodyPr/>
-          <a:lstStyle/>
-          <a:p>
-            <a:r>
-              <a:t>We delivered a reproducible, examination-grade prototype that uses exactly the four RDMU techniques to make an explainable, adaptive next-concept recommendation, end to end and fully runnable. The design keeps RL and human judgement (MCDM weights) cleanly separated and visible. Future scope: replace the tabular Q-table with function approximation to scale; calibrate on real learner telemetry; add A/B evaluation against a fixed-curriculum baseline; and extend MCDM to richer criteria. None of these change the core RDMU framing — they deepen each layer.</a:t>
-            </a:r>
-          </a:p>
-        </p:txBody>
-      </p:sp>
-      <p:sp>
-        <p:nvSpPr>
-          <p:cNvPr id="4" name="Slide Number Placeholder 3"/>
-          <p:cNvSpPr>
-            <a:spLocks noGrp="1"/>
-          </p:cNvSpPr>
-          <p:nvPr>
-            <p:ph type="sldNum" idx="5" sz="quarter"/>
+            <p:ph type="sldNum" sz="quarter" idx="5"/>
           </p:nvPr>
         </p:nvSpPr>
         <p:spPr/>
@@ -607,7 +401,7 @@
 </file>
 
 <file path=ppt/notesSlides/notesSlide2.xml><?xml version="1.0" encoding="utf-8"?>
-<p:notes xmlns:a="http://schemas.openxmlformats.org/drawingml/2006/main" xmlns:p="http://schemas.openxmlformats.org/presentationml/2006/main" xmlns:r="http://schemas.openxmlformats.org/officeDocument/2006/relationships">
+<p:notes xmlns:a="http://schemas.openxmlformats.org/drawingml/2006/main" xmlns:r="http://schemas.openxmlformats.org/officeDocument/2006/relationships" xmlns:p="http://schemas.openxmlformats.org/presentationml/2006/main">
   <p:cSld>
     <p:spTree>
       <p:nvGrpSpPr>
@@ -627,43 +421,43 @@
         <p:nvSpPr>
           <p:cNvPr id="2" name="Slide Image Placeholder 1"/>
           <p:cNvSpPr>
+            <a:spLocks noGrp="1" noRot="1" noChangeAspect="1"/>
+          </p:cNvSpPr>
+          <p:nvPr>
+            <p:ph type="sldImg" idx="2"/>
+          </p:nvPr>
+        </p:nvSpPr>
+        <p:spPr/>
+      </p:sp>
+      <p:sp>
+        <p:nvSpPr>
+          <p:cNvPr id="3" name="Notes Placeholder 2"/>
+          <p:cNvSpPr>
             <a:spLocks noGrp="1"/>
           </p:cNvSpPr>
           <p:nvPr>
-            <p:ph type="sldImg" idx="2"/>
+            <p:ph type="body" sz="quarter" idx="3"/>
           </p:nvPr>
         </p:nvSpPr>
         <p:spPr/>
-      </p:sp>
-      <p:sp>
-        <p:nvSpPr>
-          <p:cNvPr id="3" name="Notes Placeholder 2"/>
+        <p:txBody>
+          <a:bodyPr/>
+          <a:lstStyle/>
+          <a:p>
+            <a:r>
+              <a:t>The requirement is a recommender that is adaptive, sequential and explainable. That rules out a static rules engine and a black-box classifier. It calls for a state-based decision model (MDP), a method that improves a policy from experience (Q-learning), a principled way to explore early (epsilon-greedy), and a transparent override layer (MCDM). We deliberately constrained ourselves to exactly these four RDMU techniques.</a:t>
+            </a:r>
+          </a:p>
+        </p:txBody>
+      </p:sp>
+      <p:sp>
+        <p:nvSpPr>
+          <p:cNvPr id="4" name="Slide Number Placeholder 3"/>
           <p:cNvSpPr>
             <a:spLocks noGrp="1"/>
           </p:cNvSpPr>
           <p:nvPr>
-            <p:ph type="body" idx="3" sz="quarter"/>
-          </p:nvPr>
-        </p:nvSpPr>
-        <p:spPr/>
-        <p:txBody>
-          <a:bodyPr/>
-          <a:lstStyle/>
-          <a:p>
-            <a:r>
-              <a:t>The requirement is a recommender that is adaptive, sequential and explainable. That rules out a static rules engine and a black-box classifier. It calls for a state-based decision model (MDP), a method that improves a policy from experience (Q-learning), a principled way to explore early (epsilon-greedy), and a transparent override layer (MCDM). We deliberately constrained ourselves to exactly these four RDMU techniques.</a:t>
-            </a:r>
-          </a:p>
-        </p:txBody>
-      </p:sp>
-      <p:sp>
-        <p:nvSpPr>
-          <p:cNvPr id="4" name="Slide Number Placeholder 3"/>
-          <p:cNvSpPr>
-            <a:spLocks noGrp="1"/>
-          </p:cNvSpPr>
-          <p:nvPr>
-            <p:ph type="sldNum" idx="5" sz="quarter"/>
+            <p:ph type="sldNum" sz="quarter" idx="5"/>
           </p:nvPr>
         </p:nvSpPr>
         <p:spPr/>
@@ -677,7 +471,7 @@
 </file>
 
 <file path=ppt/notesSlides/notesSlide3.xml><?xml version="1.0" encoding="utf-8"?>
-<p:notes xmlns:a="http://schemas.openxmlformats.org/drawingml/2006/main" xmlns:p="http://schemas.openxmlformats.org/presentationml/2006/main" xmlns:r="http://schemas.openxmlformats.org/officeDocument/2006/relationships">
+<p:notes xmlns:a="http://schemas.openxmlformats.org/drawingml/2006/main" xmlns:r="http://schemas.openxmlformats.org/officeDocument/2006/relationships" xmlns:p="http://schemas.openxmlformats.org/presentationml/2006/main">
   <p:cSld>
     <p:spTree>
       <p:nvGrpSpPr>
@@ -697,43 +491,43 @@
         <p:nvSpPr>
           <p:cNvPr id="2" name="Slide Image Placeholder 1"/>
           <p:cNvSpPr>
+            <a:spLocks noGrp="1" noRot="1" noChangeAspect="1"/>
+          </p:cNvSpPr>
+          <p:nvPr>
+            <p:ph type="sldImg" idx="2"/>
+          </p:nvPr>
+        </p:nvSpPr>
+        <p:spPr/>
+      </p:sp>
+      <p:sp>
+        <p:nvSpPr>
+          <p:cNvPr id="3" name="Notes Placeholder 2"/>
+          <p:cNvSpPr>
             <a:spLocks noGrp="1"/>
           </p:cNvSpPr>
           <p:nvPr>
-            <p:ph type="sldImg" idx="2"/>
+            <p:ph type="body" sz="quarter" idx="3"/>
           </p:nvPr>
         </p:nvSpPr>
         <p:spPr/>
-      </p:sp>
-      <p:sp>
-        <p:nvSpPr>
-          <p:cNvPr id="3" name="Notes Placeholder 2"/>
+        <p:txBody>
+          <a:bodyPr/>
+          <a:lstStyle/>
+          <a:p>
+            <a:r>
+              <a:t>On any learning platform, fixed linear curricula ignore that learners differ. Mis-sequencing causes two failure modes: prerequisites violated (frustration, drop-off) and difficulty mismatch (disengagement). The cost is measurable — lower completion and weaker mastery. Our system personalises the order of learning to each student's state, aiming to reach the objective efficiently and at an appropriate difficulty, with the instructor in control.</a:t>
+            </a:r>
+          </a:p>
+        </p:txBody>
+      </p:sp>
+      <p:sp>
+        <p:nvSpPr>
+          <p:cNvPr id="4" name="Slide Number Placeholder 3"/>
           <p:cNvSpPr>
             <a:spLocks noGrp="1"/>
           </p:cNvSpPr>
           <p:nvPr>
-            <p:ph type="body" idx="3" sz="quarter"/>
-          </p:nvPr>
-        </p:nvSpPr>
-        <p:spPr/>
-        <p:txBody>
-          <a:bodyPr/>
-          <a:lstStyle/>
-          <a:p>
-            <a:r>
-              <a:t>On any learning platform, fixed linear curricula ignore that learners differ. Mis-sequencing causes two failure modes: prerequisites violated (frustration, drop-off) and difficulty mismatch (disengagement). The cost is measurable — lower completion and weaker mastery. Our system personalises the order of learning to each student's state, aiming to reach the objective efficiently and at an appropriate difficulty, with the instructor in control.</a:t>
-            </a:r>
-          </a:p>
-        </p:txBody>
-      </p:sp>
-      <p:sp>
-        <p:nvSpPr>
-          <p:cNvPr id="4" name="Slide Number Placeholder 3"/>
-          <p:cNvSpPr>
-            <a:spLocks noGrp="1"/>
-          </p:cNvSpPr>
-          <p:nvPr>
-            <p:ph type="sldNum" idx="5" sz="quarter"/>
+            <p:ph type="sldNum" sz="quarter" idx="5"/>
           </p:nvPr>
         </p:nvSpPr>
         <p:spPr/>
@@ -747,7 +541,7 @@
 </file>
 
 <file path=ppt/notesSlides/notesSlide4.xml><?xml version="1.0" encoding="utf-8"?>
-<p:notes xmlns:a="http://schemas.openxmlformats.org/drawingml/2006/main" xmlns:p="http://schemas.openxmlformats.org/presentationml/2006/main" xmlns:r="http://schemas.openxmlformats.org/officeDocument/2006/relationships">
+<p:notes xmlns:a="http://schemas.openxmlformats.org/drawingml/2006/main" xmlns:r="http://schemas.openxmlformats.org/officeDocument/2006/relationships" xmlns:p="http://schemas.openxmlformats.org/presentationml/2006/main">
   <p:cSld>
     <p:spTree>
       <p:nvGrpSpPr>
@@ -767,43 +561,43 @@
         <p:nvSpPr>
           <p:cNvPr id="2" name="Slide Image Placeholder 1"/>
           <p:cNvSpPr>
+            <a:spLocks noGrp="1" noRot="1" noChangeAspect="1"/>
+          </p:cNvSpPr>
+          <p:nvPr>
+            <p:ph type="sldImg" idx="2"/>
+          </p:nvPr>
+        </p:nvSpPr>
+        <p:spPr/>
+      </p:sp>
+      <p:sp>
+        <p:nvSpPr>
+          <p:cNvPr id="3" name="Notes Placeholder 2"/>
+          <p:cNvSpPr>
             <a:spLocks noGrp="1"/>
           </p:cNvSpPr>
           <p:nvPr>
-            <p:ph type="sldImg" idx="2"/>
+            <p:ph type="body" sz="quarter" idx="3"/>
           </p:nvPr>
         </p:nvSpPr>
         <p:spPr/>
-      </p:sp>
-      <p:sp>
-        <p:nvSpPr>
-          <p:cNvPr id="3" name="Notes Placeholder 2"/>
+        <p:txBody>
+          <a:bodyPr/>
+          <a:lstStyle/>
+          <a:p>
+            <a:r>
+              <a:t>Data flows one direction with clean separation. A synthetic, internally-consistent dataset of 2,200 students calibrates the environment's transition probabilities and supplies profiles. The Q-learning agent trains online against the simulated environment — never directly on the CSV — and the learned Q-table is pickled. At inference the dashboard loads it (cached), ranks valid next concepts, hands the top-k to MCDM, and shows both rankings.</a:t>
+            </a:r>
+          </a:p>
+        </p:txBody>
+      </p:sp>
+      <p:sp>
+        <p:nvSpPr>
+          <p:cNvPr id="4" name="Slide Number Placeholder 3"/>
           <p:cNvSpPr>
             <a:spLocks noGrp="1"/>
           </p:cNvSpPr>
           <p:nvPr>
-            <p:ph type="body" idx="3" sz="quarter"/>
-          </p:nvPr>
-        </p:nvSpPr>
-        <p:spPr/>
-        <p:txBody>
-          <a:bodyPr/>
-          <a:lstStyle/>
-          <a:p>
-            <a:r>
-              <a:t>Data flows one direction with clean separation. A synthetic, internally-consistent dataset of 2,200 students calibrates the environment's transition probabilities and supplies profiles. The Q-learning agent trains online against the simulated environment — never directly on the CSV — and the learned Q-table is pickled. At inference the dashboard loads it (cached), ranks valid next concepts, hands the top-k to MCDM, and shows both rankings.</a:t>
-            </a:r>
-          </a:p>
-        </p:txBody>
-      </p:sp>
-      <p:sp>
-        <p:nvSpPr>
-          <p:cNvPr id="4" name="Slide Number Placeholder 3"/>
-          <p:cNvSpPr>
-            <a:spLocks noGrp="1"/>
-          </p:cNvSpPr>
-          <p:nvPr>
-            <p:ph type="sldNum" idx="5" sz="quarter"/>
+            <p:ph type="sldNum" sz="quarter" idx="5"/>
           </p:nvPr>
         </p:nvSpPr>
         <p:spPr/>
@@ -817,7 +611,7 @@
 </file>
 
 <file path=ppt/notesSlides/notesSlide5.xml><?xml version="1.0" encoding="utf-8"?>
-<p:notes xmlns:a="http://schemas.openxmlformats.org/drawingml/2006/main" xmlns:p="http://schemas.openxmlformats.org/presentationml/2006/main" xmlns:r="http://schemas.openxmlformats.org/officeDocument/2006/relationships">
+<p:notes xmlns:a="http://schemas.openxmlformats.org/drawingml/2006/main" xmlns:r="http://schemas.openxmlformats.org/officeDocument/2006/relationships" xmlns:p="http://schemas.openxmlformats.org/presentationml/2006/main">
   <p:cSld>
     <p:spTree>
       <p:nvGrpSpPr>
@@ -837,43 +631,43 @@
         <p:nvSpPr>
           <p:cNvPr id="2" name="Slide Image Placeholder 1"/>
           <p:cNvSpPr>
+            <a:spLocks noGrp="1" noRot="1" noChangeAspect="1"/>
+          </p:cNvSpPr>
+          <p:nvPr>
+            <p:ph type="sldImg" idx="2"/>
+          </p:nvPr>
+        </p:nvSpPr>
+        <p:spPr/>
+      </p:sp>
+      <p:sp>
+        <p:nvSpPr>
+          <p:cNvPr id="3" name="Notes Placeholder 2"/>
+          <p:cNvSpPr>
             <a:spLocks noGrp="1"/>
           </p:cNvSpPr>
           <p:nvPr>
-            <p:ph type="sldImg" idx="2"/>
+            <p:ph type="body" sz="quarter" idx="3"/>
           </p:nvPr>
         </p:nvSpPr>
         <p:spPr/>
-      </p:sp>
-      <p:sp>
-        <p:nvSpPr>
-          <p:cNvPr id="3" name="Notes Placeholder 2"/>
+        <p:txBody>
+          <a:bodyPr/>
+          <a:lstStyle/>
+          <a:p>
+            <a:r>
+              <a:t>A — MDP: state is (current concept, mastery band, study-time band); action is the next concept restricted to valid candidates; reward blends mastery gain, difficulty suitability, preference match, time efficiency and progress. B — epsilon-greedy with epsilon decaying from 1.0 to a 0.1 floor. C — a 288×24 Q-table updated by the TD rule across 5,000 episodes. D — weighted scoring over five tunable criteria re-ranks the RL shortlist; the winner is the final recommendation.</a:t>
+            </a:r>
+          </a:p>
+        </p:txBody>
+      </p:sp>
+      <p:sp>
+        <p:nvSpPr>
+          <p:cNvPr id="4" name="Slide Number Placeholder 3"/>
           <p:cNvSpPr>
             <a:spLocks noGrp="1"/>
           </p:cNvSpPr>
           <p:nvPr>
-            <p:ph type="body" idx="3" sz="quarter"/>
-          </p:nvPr>
-        </p:nvSpPr>
-        <p:spPr/>
-        <p:txBody>
-          <a:bodyPr/>
-          <a:lstStyle/>
-          <a:p>
-            <a:r>
-              <a:t>A — MDP: state is (current concept, mastery band, study-time band); action is the next concept restricted to valid candidates; reward blends mastery gain, difficulty suitability, preference match, time efficiency and progress. B — epsilon-greedy with epsilon decaying from 1.0 to a 0.1 floor. C — a 288×24 Q-table updated by the TD rule across 5,000 episodes. D — weighted scoring over five tunable criteria re-ranks the RL shortlist; the winner is the final recommendation.</a:t>
-            </a:r>
-          </a:p>
-        </p:txBody>
-      </p:sp>
-      <p:sp>
-        <p:nvSpPr>
-          <p:cNvPr id="4" name="Slide Number Placeholder 3"/>
-          <p:cNvSpPr>
-            <a:spLocks noGrp="1"/>
-          </p:cNvSpPr>
-          <p:nvPr>
-            <p:ph type="sldNum" idx="5" sz="quarter"/>
+            <p:ph type="sldNum" sz="quarter" idx="5"/>
           </p:nvPr>
         </p:nvSpPr>
         <p:spPr/>
@@ -887,7 +681,7 @@
 </file>
 
 <file path=ppt/notesSlides/notesSlide6.xml><?xml version="1.0" encoding="utf-8"?>
-<p:notes xmlns:a="http://schemas.openxmlformats.org/drawingml/2006/main" xmlns:p="http://schemas.openxmlformats.org/presentationml/2006/main" xmlns:r="http://schemas.openxmlformats.org/officeDocument/2006/relationships">
+<p:notes xmlns:a="http://schemas.openxmlformats.org/drawingml/2006/main" xmlns:r="http://schemas.openxmlformats.org/officeDocument/2006/relationships" xmlns:p="http://schemas.openxmlformats.org/presentationml/2006/main">
   <p:cSld>
     <p:spTree>
       <p:nvGrpSpPr>
@@ -907,43 +701,43 @@
         <p:nvSpPr>
           <p:cNvPr id="2" name="Slide Image Placeholder 1"/>
           <p:cNvSpPr>
+            <a:spLocks noGrp="1" noRot="1" noChangeAspect="1"/>
+          </p:cNvSpPr>
+          <p:nvPr>
+            <p:ph type="sldImg" idx="2"/>
+          </p:nvPr>
+        </p:nvSpPr>
+        <p:spPr/>
+      </p:sp>
+      <p:sp>
+        <p:nvSpPr>
+          <p:cNvPr id="3" name="Notes Placeholder 2"/>
+          <p:cNvSpPr>
             <a:spLocks noGrp="1"/>
           </p:cNvSpPr>
           <p:nvPr>
-            <p:ph type="sldImg" idx="2"/>
+            <p:ph type="body" sz="quarter" idx="3"/>
           </p:nvPr>
         </p:nvSpPr>
         <p:spPr/>
-      </p:sp>
-      <p:sp>
-        <p:nvSpPr>
-          <p:cNvPr id="3" name="Notes Placeholder 2"/>
+        <p:txBody>
+          <a:bodyPr/>
+          <a:lstStyle/>
+          <a:p>
+            <a:r>
+              <a:t>We generate 2,200 students with seed 42 so anyone can reproduce the exact dataset. The 16 columns span demographics, assessment scores, study habits, preferences and a prerequisite-valid concept triple from a topological order of the 24-concept DAG. The generative model is internally consistent: more weekly study hours yield higher mastery growth (verified terciles 0.34 / 0.47 / 0.70), and scores track mastery. It calibrates the environment and drives analytics; the agent never trains on it directly.</a:t>
+            </a:r>
+          </a:p>
+        </p:txBody>
+      </p:sp>
+      <p:sp>
+        <p:nvSpPr>
+          <p:cNvPr id="4" name="Slide Number Placeholder 3"/>
           <p:cNvSpPr>
             <a:spLocks noGrp="1"/>
           </p:cNvSpPr>
           <p:nvPr>
-            <p:ph type="body" idx="3" sz="quarter"/>
-          </p:nvPr>
-        </p:nvSpPr>
-        <p:spPr/>
-        <p:txBody>
-          <a:bodyPr/>
-          <a:lstStyle/>
-          <a:p>
-            <a:r>
-              <a:t>We generate 2,200 students with seed 42 so anyone can reproduce the exact dataset. The 16 columns span demographics, assessment scores, study habits, preferences and a prerequisite-valid concept triple from a topological order of the 24-concept DAG. The generative model is internally consistent: more weekly study hours yield higher mastery growth (verified terciles 0.34 / 0.47 / 0.70), and scores track mastery. It calibrates the environment and drives analytics; the agent never trains on it directly.</a:t>
-            </a:r>
-          </a:p>
-        </p:txBody>
-      </p:sp>
-      <p:sp>
-        <p:nvSpPr>
-          <p:cNvPr id="4" name="Slide Number Placeholder 3"/>
-          <p:cNvSpPr>
-            <a:spLocks noGrp="1"/>
-          </p:cNvSpPr>
-          <p:nvPr>
-            <p:ph type="sldNum" idx="5" sz="quarter"/>
+            <p:ph type="sldNum" sz="quarter" idx="5"/>
           </p:nvPr>
         </p:nvSpPr>
         <p:spPr/>
@@ -957,7 +751,7 @@
 </file>
 
 <file path=ppt/notesSlides/notesSlide7.xml><?xml version="1.0" encoding="utf-8"?>
-<p:notes xmlns:a="http://schemas.openxmlformats.org/drawingml/2006/main" xmlns:p="http://schemas.openxmlformats.org/presentationml/2006/main" xmlns:r="http://schemas.openxmlformats.org/officeDocument/2006/relationships">
+<p:notes xmlns:a="http://schemas.openxmlformats.org/drawingml/2006/main" xmlns:r="http://schemas.openxmlformats.org/officeDocument/2006/relationships" xmlns:p="http://schemas.openxmlformats.org/presentationml/2006/main">
   <p:cSld>
     <p:spTree>
       <p:nvGrpSpPr>
@@ -977,43 +771,43 @@
         <p:nvSpPr>
           <p:cNvPr id="2" name="Slide Image Placeholder 1"/>
           <p:cNvSpPr>
+            <a:spLocks noGrp="1" noRot="1" noChangeAspect="1"/>
+          </p:cNvSpPr>
+          <p:nvPr>
+            <p:ph type="sldImg" idx="2"/>
+          </p:nvPr>
+        </p:nvSpPr>
+        <p:spPr/>
+      </p:sp>
+      <p:sp>
+        <p:nvSpPr>
+          <p:cNvPr id="3" name="Notes Placeholder 2"/>
+          <p:cNvSpPr>
             <a:spLocks noGrp="1"/>
           </p:cNvSpPr>
           <p:nvPr>
-            <p:ph type="sldImg" idx="2"/>
+            <p:ph type="body" sz="quarter" idx="3"/>
           </p:nvPr>
         </p:nvSpPr>
         <p:spPr/>
-      </p:sp>
-      <p:sp>
-        <p:nvSpPr>
-          <p:cNvPr id="3" name="Notes Placeholder 2"/>
+        <p:txBody>
+          <a:bodyPr/>
+          <a:lstStyle/>
+          <a:p>
+            <a:r>
+              <a:t>Every shared fact has one home. The 24-concept catalogue lives only in utils/concepts.py; graph, dataset and environment import it, so there's no drift. Configuration is centralised in utils/config.py. RL holds the environment, agent and trainer; MCDM is isolated; visualizations are pure functions returning Plotly figures; the app composes them with cache_resource for the model and cache_data for the data. Pre-training is a script, so the app loads instantly and never retrains on interaction.</a:t>
+            </a:r>
+          </a:p>
+        </p:txBody>
+      </p:sp>
+      <p:sp>
+        <p:nvSpPr>
+          <p:cNvPr id="4" name="Slide Number Placeholder 3"/>
           <p:cNvSpPr>
             <a:spLocks noGrp="1"/>
           </p:cNvSpPr>
           <p:nvPr>
-            <p:ph type="body" idx="3" sz="quarter"/>
-          </p:nvPr>
-        </p:nvSpPr>
-        <p:spPr/>
-        <p:txBody>
-          <a:bodyPr/>
-          <a:lstStyle/>
-          <a:p>
-            <a:r>
-              <a:t>Every shared fact has one home. The 24-concept catalogue lives only in utils/concepts.py; graph, dataset and environment import it, so there's no drift. Configuration is centralised in utils/config.py. RL holds the environment, agent and trainer; MCDM is isolated; visualizations are pure functions returning Plotly figures; the app composes them with cache_resource for the model and cache_data for the data. Pre-training is a script, so the app loads instantly and never retrains on interaction.</a:t>
-            </a:r>
-          </a:p>
-        </p:txBody>
-      </p:sp>
-      <p:sp>
-        <p:nvSpPr>
-          <p:cNvPr id="4" name="Slide Number Placeholder 3"/>
-          <p:cNvSpPr>
-            <a:spLocks noGrp="1"/>
-          </p:cNvSpPr>
-          <p:nvPr>
-            <p:ph type="sldNum" idx="5" sz="quarter"/>
+            <p:ph type="sldNum" sz="quarter" idx="5"/>
           </p:nvPr>
         </p:nvSpPr>
         <p:spPr/>
@@ -1027,7 +821,7 @@
 </file>
 
 <file path=ppt/notesSlides/notesSlide8.xml><?xml version="1.0" encoding="utf-8"?>
-<p:notes xmlns:a="http://schemas.openxmlformats.org/drawingml/2006/main" xmlns:p="http://schemas.openxmlformats.org/presentationml/2006/main" xmlns:r="http://schemas.openxmlformats.org/officeDocument/2006/relationships">
+<p:notes xmlns:a="http://schemas.openxmlformats.org/drawingml/2006/main" xmlns:r="http://schemas.openxmlformats.org/officeDocument/2006/relationships" xmlns:p="http://schemas.openxmlformats.org/presentationml/2006/main">
   <p:cSld>
     <p:spTree>
       <p:nvGrpSpPr>
@@ -1047,43 +841,43 @@
         <p:nvSpPr>
           <p:cNvPr id="2" name="Slide Image Placeholder 1"/>
           <p:cNvSpPr>
+            <a:spLocks noGrp="1" noRot="1" noChangeAspect="1"/>
+          </p:cNvSpPr>
+          <p:nvPr>
+            <p:ph type="sldImg" idx="2"/>
+          </p:nvPr>
+        </p:nvSpPr>
+        <p:spPr/>
+      </p:sp>
+      <p:sp>
+        <p:nvSpPr>
+          <p:cNvPr id="3" name="Notes Placeholder 2"/>
+          <p:cNvSpPr>
             <a:spLocks noGrp="1"/>
           </p:cNvSpPr>
           <p:nvPr>
-            <p:ph type="sldImg" idx="2"/>
+            <p:ph type="body" sz="quarter" idx="3"/>
           </p:nvPr>
         </p:nvSpPr>
         <p:spPr/>
-      </p:sp>
-      <p:sp>
-        <p:nvSpPr>
-          <p:cNvPr id="3" name="Notes Placeholder 2"/>
+        <p:txBody>
+          <a:bodyPr/>
+          <a:lstStyle/>
+          <a:p>
+            <a:r>
+              <a:t>The dashboard walks from context to decision to evaluation. Overview frames the problem and the four concepts; Student Profile and the interactive Concept Graph give context; the Recommendation page is the heart — RL ranking and MCDM re-ranking side by side, plus the final pick; RL Policy exposes training internals (reward curve, epsilon decay, explore/exploit, policy stability, Q-value heatmap) and a retrain control; Mastery Analytics and MCDM Settings probe data and steer weights live; Performance Metrics closes with the KPI set. The visual language follows the Linear design system.</a:t>
+            </a:r>
+          </a:p>
+        </p:txBody>
+      </p:sp>
+      <p:sp>
+        <p:nvSpPr>
+          <p:cNvPr id="4" name="Slide Number Placeholder 3"/>
           <p:cNvSpPr>
             <a:spLocks noGrp="1"/>
           </p:cNvSpPr>
           <p:nvPr>
-            <p:ph type="body" idx="3" sz="quarter"/>
-          </p:nvPr>
-        </p:nvSpPr>
-        <p:spPr/>
-        <p:txBody>
-          <a:bodyPr/>
-          <a:lstStyle/>
-          <a:p>
-            <a:r>
-              <a:t>The dashboard walks from context to decision to evaluation. Overview frames the problem and the four concepts; Student Profile and the interactive Concept Graph give context; the Recommendation page is the heart — RL ranking and MCDM re-ranking side by side, plus the final pick; RL Policy exposes training internals (reward curve, epsilon decay, explore/exploit, policy stability, Q-value heatmap) and a retrain control; Mastery Analytics and MCDM Settings probe data and steer weights live; Performance Metrics closes with the KPI set. The visual language follows the Linear design system.</a:t>
-            </a:r>
-          </a:p>
-        </p:txBody>
-      </p:sp>
-      <p:sp>
-        <p:nvSpPr>
-          <p:cNvPr id="4" name="Slide Number Placeholder 3"/>
-          <p:cNvSpPr>
-            <a:spLocks noGrp="1"/>
-          </p:cNvSpPr>
-          <p:nvPr>
-            <p:ph type="sldNum" idx="5" sz="quarter"/>
+            <p:ph type="sldNum" sz="quarter" idx="5"/>
           </p:nvPr>
         </p:nvSpPr>
         <p:spPr/>
@@ -1097,7 +891,7 @@
 </file>
 
 <file path=ppt/notesSlides/notesSlide9.xml><?xml version="1.0" encoding="utf-8"?>
-<p:notes xmlns:a="http://schemas.openxmlformats.org/drawingml/2006/main" xmlns:p="http://schemas.openxmlformats.org/presentationml/2006/main" xmlns:r="http://schemas.openxmlformats.org/officeDocument/2006/relationships">
+<p:notes xmlns:a="http://schemas.openxmlformats.org/drawingml/2006/main" xmlns:r="http://schemas.openxmlformats.org/officeDocument/2006/relationships" xmlns:p="http://schemas.openxmlformats.org/presentationml/2006/main">
   <p:cSld>
     <p:spTree>
       <p:nvGrpSpPr>
@@ -1117,43 +911,43 @@
         <p:nvSpPr>
           <p:cNvPr id="2" name="Slide Image Placeholder 1"/>
           <p:cNvSpPr>
+            <a:spLocks noGrp="1" noRot="1" noChangeAspect="1"/>
+          </p:cNvSpPr>
+          <p:nvPr>
+            <p:ph type="sldImg" idx="2"/>
+          </p:nvPr>
+        </p:nvSpPr>
+        <p:spPr/>
+      </p:sp>
+      <p:sp>
+        <p:nvSpPr>
+          <p:cNvPr id="3" name="Notes Placeholder 2"/>
+          <p:cNvSpPr>
             <a:spLocks noGrp="1"/>
           </p:cNvSpPr>
           <p:nvPr>
-            <p:ph type="sldImg" idx="2"/>
+            <p:ph type="body" sz="quarter" idx="3"/>
           </p:nvPr>
         </p:nvSpPr>
         <p:spPr/>
-      </p:sp>
-      <p:sp>
-        <p:nvSpPr>
-          <p:cNvPr id="3" name="Notes Placeholder 2"/>
+        <p:txBody>
+          <a:bodyPr/>
+          <a:lstStyle/>
+          <a:p>
+            <a:r>
+              <a:t>Yes — measured with precisely-defined metrics, not a vague accuracy. Mean episodic reward rose from 1.54 (early, exploratory) to 8.49 (converged) — a clear learning curve produced by a deliberately tight 22-step budget that forces efficiency. The greedy policy reaches the objective on ~92% of paths, and ~98% of states have a stable greedy action across the last checkpoints. Recommendation Accuracy — our stated RL-vs-MCDM agreement proxy — is ~51%, the point being that MCDM genuinely re-ranks about half the time, so the instructor's weights matter. Mastery rate (students past 50% of the curriculum) is about 31%.</a:t>
+            </a:r>
+          </a:p>
+        </p:txBody>
+      </p:sp>
+      <p:sp>
+        <p:nvSpPr>
+          <p:cNvPr id="4" name="Slide Number Placeholder 3"/>
           <p:cNvSpPr>
             <a:spLocks noGrp="1"/>
           </p:cNvSpPr>
           <p:nvPr>
-            <p:ph type="body" idx="3" sz="quarter"/>
-          </p:nvPr>
-        </p:nvSpPr>
-        <p:spPr/>
-        <p:txBody>
-          <a:bodyPr/>
-          <a:lstStyle/>
-          <a:p>
-            <a:r>
-              <a:t>Yes — measured with precisely-defined metrics, not a vague accuracy. Mean episodic reward rose from 1.54 (early, exploratory) to 8.49 (converged) — a clear learning curve produced by a deliberately tight 22-step budget that forces efficiency. The greedy policy reaches the objective on ~92% of paths, and ~98% of states have a stable greedy action across the last checkpoints. Recommendation Accuracy — our stated RL-vs-MCDM agreement proxy — is ~51%, the point being that MCDM genuinely re-ranks about half the time, so the instructor's weights matter. Mastery rate (students past 50% of the curriculum) is about 31%.</a:t>
-            </a:r>
-          </a:p>
-        </p:txBody>
-      </p:sp>
-      <p:sp>
-        <p:nvSpPr>
-          <p:cNvPr id="4" name="Slide Number Placeholder 3"/>
-          <p:cNvSpPr>
-            <a:spLocks noGrp="1"/>
-          </p:cNvSpPr>
-          <p:nvPr>
-            <p:ph type="sldNum" idx="5" sz="quarter"/>
+            <p:ph type="sldNum" sz="quarter" idx="5"/>
           </p:nvPr>
         </p:nvSpPr>
         <p:spPr/>
@@ -1204,10 +998,9 @@
           <a:lstStyle/>
           <a:p>
             <a:r>
-              <a:rPr lang="en-US" smtClean="0"/>
+              <a:rPr lang="en-US"/>
               <a:t>Click to edit Master title style</a:t>
             </a:r>
-            <a:endParaRPr lang="en-US"/>
           </a:p>
         </p:txBody>
       </p:sp>
@@ -1323,10 +1116,9 @@
           </a:lstStyle>
           <a:p>
             <a:r>
-              <a:rPr lang="en-US" smtClean="0"/>
+              <a:rPr lang="en-US"/>
               <a:t>Click to edit Master subtitle style</a:t>
             </a:r>
-            <a:endParaRPr lang="en-US"/>
           </a:p>
         </p:txBody>
       </p:sp>
@@ -1347,7 +1139,7 @@
           <a:p>
             <a:fld id="{5BCAD085-E8A6-8845-BD4E-CB4CCA059FC4}" type="datetimeFigureOut">
               <a:rPr lang="en-US" smtClean="0"/>
-              <a:t>1/27/13</a:t>
+              <a:t>6/10/2026</a:t>
             </a:fld>
             <a:endParaRPr lang="en-US"/>
           </a:p>
@@ -1441,10 +1233,9 @@
           <a:lstStyle/>
           <a:p>
             <a:r>
-              <a:rPr lang="en-US" smtClean="0"/>
+              <a:rPr lang="en-US"/>
               <a:t>Click to edit Master title style</a:t>
             </a:r>
-            <a:endParaRPr lang="en-US"/>
           </a:p>
         </p:txBody>
       </p:sp>
@@ -1465,38 +1256,37 @@
           <a:p>
             <a:pPr lvl="0"/>
             <a:r>
-              <a:rPr lang="en-US" smtClean="0"/>
+              <a:rPr lang="en-US"/>
               <a:t>Click to edit Master text styles</a:t>
             </a:r>
           </a:p>
           <a:p>
             <a:pPr lvl="1"/>
             <a:r>
-              <a:rPr lang="en-US" smtClean="0"/>
+              <a:rPr lang="en-US"/>
               <a:t>Second level</a:t>
             </a:r>
           </a:p>
           <a:p>
             <a:pPr lvl="2"/>
             <a:r>
-              <a:rPr lang="en-US" smtClean="0"/>
+              <a:rPr lang="en-US"/>
               <a:t>Third level</a:t>
             </a:r>
           </a:p>
           <a:p>
             <a:pPr lvl="3"/>
             <a:r>
-              <a:rPr lang="en-US" smtClean="0"/>
+              <a:rPr lang="en-US"/>
               <a:t>Fourth level</a:t>
             </a:r>
           </a:p>
           <a:p>
             <a:pPr lvl="4"/>
             <a:r>
-              <a:rPr lang="en-US" smtClean="0"/>
+              <a:rPr lang="en-US"/>
               <a:t>Fifth level</a:t>
             </a:r>
-            <a:endParaRPr lang="en-US"/>
           </a:p>
         </p:txBody>
       </p:sp>
@@ -1517,7 +1307,7 @@
           <a:p>
             <a:fld id="{5BCAD085-E8A6-8845-BD4E-CB4CCA059FC4}" type="datetimeFigureOut">
               <a:rPr lang="en-US" smtClean="0"/>
-              <a:t>1/27/13</a:t>
+              <a:t>6/10/2026</a:t>
             </a:fld>
             <a:endParaRPr lang="en-US"/>
           </a:p>
@@ -1616,10 +1406,9 @@
           <a:lstStyle/>
           <a:p>
             <a:r>
-              <a:rPr lang="en-US" smtClean="0"/>
+              <a:rPr lang="en-US"/>
               <a:t>Click to edit Master title style</a:t>
             </a:r>
-            <a:endParaRPr lang="en-US"/>
           </a:p>
         </p:txBody>
       </p:sp>
@@ -1645,38 +1434,37 @@
           <a:p>
             <a:pPr lvl="0"/>
             <a:r>
-              <a:rPr lang="en-US" smtClean="0"/>
+              <a:rPr lang="en-US"/>
               <a:t>Click to edit Master text styles</a:t>
             </a:r>
           </a:p>
           <a:p>
             <a:pPr lvl="1"/>
             <a:r>
-              <a:rPr lang="en-US" smtClean="0"/>
+              <a:rPr lang="en-US"/>
               <a:t>Second level</a:t>
             </a:r>
           </a:p>
           <a:p>
             <a:pPr lvl="2"/>
             <a:r>
-              <a:rPr lang="en-US" smtClean="0"/>
+              <a:rPr lang="en-US"/>
               <a:t>Third level</a:t>
             </a:r>
           </a:p>
           <a:p>
             <a:pPr lvl="3"/>
             <a:r>
-              <a:rPr lang="en-US" smtClean="0"/>
+              <a:rPr lang="en-US"/>
               <a:t>Fourth level</a:t>
             </a:r>
           </a:p>
           <a:p>
             <a:pPr lvl="4"/>
             <a:r>
-              <a:rPr lang="en-US" smtClean="0"/>
+              <a:rPr lang="en-US"/>
               <a:t>Fifth level</a:t>
             </a:r>
-            <a:endParaRPr lang="en-US"/>
           </a:p>
         </p:txBody>
       </p:sp>
@@ -1697,7 +1485,7 @@
           <a:p>
             <a:fld id="{5BCAD085-E8A6-8845-BD4E-CB4CCA059FC4}" type="datetimeFigureOut">
               <a:rPr lang="en-US" smtClean="0"/>
-              <a:t>1/27/13</a:t>
+              <a:t>6/10/2026</a:t>
             </a:fld>
             <a:endParaRPr lang="en-US"/>
           </a:p>
@@ -1791,10 +1579,9 @@
           <a:lstStyle/>
           <a:p>
             <a:r>
-              <a:rPr lang="en-US" smtClean="0"/>
+              <a:rPr lang="en-US"/>
               <a:t>Click to edit Master title style</a:t>
             </a:r>
-            <a:endParaRPr lang="en-US"/>
           </a:p>
         </p:txBody>
       </p:sp>
@@ -1815,38 +1602,37 @@
           <a:p>
             <a:pPr lvl="0"/>
             <a:r>
-              <a:rPr lang="en-US" smtClean="0"/>
+              <a:rPr lang="en-US"/>
               <a:t>Click to edit Master text styles</a:t>
             </a:r>
           </a:p>
           <a:p>
             <a:pPr lvl="1"/>
             <a:r>
-              <a:rPr lang="en-US" smtClean="0"/>
+              <a:rPr lang="en-US"/>
               <a:t>Second level</a:t>
             </a:r>
           </a:p>
           <a:p>
             <a:pPr lvl="2"/>
             <a:r>
-              <a:rPr lang="en-US" smtClean="0"/>
+              <a:rPr lang="en-US"/>
               <a:t>Third level</a:t>
             </a:r>
           </a:p>
           <a:p>
             <a:pPr lvl="3"/>
             <a:r>
-              <a:rPr lang="en-US" smtClean="0"/>
+              <a:rPr lang="en-US"/>
               <a:t>Fourth level</a:t>
             </a:r>
           </a:p>
           <a:p>
             <a:pPr lvl="4"/>
             <a:r>
-              <a:rPr lang="en-US" smtClean="0"/>
+              <a:rPr lang="en-US"/>
               <a:t>Fifth level</a:t>
             </a:r>
-            <a:endParaRPr lang="en-US"/>
           </a:p>
         </p:txBody>
       </p:sp>
@@ -1867,7 +1653,7 @@
           <a:p>
             <a:fld id="{5BCAD085-E8A6-8845-BD4E-CB4CCA059FC4}" type="datetimeFigureOut">
               <a:rPr lang="en-US" smtClean="0"/>
-              <a:t>1/27/13</a:t>
+              <a:t>6/10/2026</a:t>
             </a:fld>
             <a:endParaRPr lang="en-US"/>
           </a:p>
@@ -1970,10 +1756,9 @@
           </a:lstStyle>
           <a:p>
             <a:r>
-              <a:rPr lang="en-US" smtClean="0"/>
+              <a:rPr lang="en-US"/>
               <a:t>Click to edit Master title style</a:t>
             </a:r>
-            <a:endParaRPr lang="en-US"/>
           </a:p>
         </p:txBody>
       </p:sp>
@@ -2090,7 +1875,7 @@
           <a:p>
             <a:pPr lvl="0"/>
             <a:r>
-              <a:rPr lang="en-US" smtClean="0"/>
+              <a:rPr lang="en-US"/>
               <a:t>Click to edit Master text styles</a:t>
             </a:r>
           </a:p>
@@ -2113,7 +1898,7 @@
           <a:p>
             <a:fld id="{5BCAD085-E8A6-8845-BD4E-CB4CCA059FC4}" type="datetimeFigureOut">
               <a:rPr lang="en-US" smtClean="0"/>
-              <a:t>1/27/13</a:t>
+              <a:t>6/10/2026</a:t>
             </a:fld>
             <a:endParaRPr lang="en-US"/>
           </a:p>
@@ -2207,10 +1992,9 @@
           <a:lstStyle/>
           <a:p>
             <a:r>
-              <a:rPr lang="en-US" smtClean="0"/>
+              <a:rPr lang="en-US"/>
               <a:t>Click to edit Master title style</a:t>
             </a:r>
-            <a:endParaRPr lang="en-US"/>
           </a:p>
         </p:txBody>
       </p:sp>
@@ -2264,38 +2048,37 @@
           <a:p>
             <a:pPr lvl="0"/>
             <a:r>
-              <a:rPr lang="en-US" smtClean="0"/>
+              <a:rPr lang="en-US"/>
               <a:t>Click to edit Master text styles</a:t>
             </a:r>
           </a:p>
           <a:p>
             <a:pPr lvl="1"/>
             <a:r>
-              <a:rPr lang="en-US" smtClean="0"/>
+              <a:rPr lang="en-US"/>
               <a:t>Second level</a:t>
             </a:r>
           </a:p>
           <a:p>
             <a:pPr lvl="2"/>
             <a:r>
-              <a:rPr lang="en-US" smtClean="0"/>
+              <a:rPr lang="en-US"/>
               <a:t>Third level</a:t>
             </a:r>
           </a:p>
           <a:p>
             <a:pPr lvl="3"/>
             <a:r>
-              <a:rPr lang="en-US" smtClean="0"/>
+              <a:rPr lang="en-US"/>
               <a:t>Fourth level</a:t>
             </a:r>
           </a:p>
           <a:p>
             <a:pPr lvl="4"/>
             <a:r>
-              <a:rPr lang="en-US" smtClean="0"/>
+              <a:rPr lang="en-US"/>
               <a:t>Fifth level</a:t>
             </a:r>
-            <a:endParaRPr lang="en-US"/>
           </a:p>
         </p:txBody>
       </p:sp>
@@ -2349,38 +2132,37 @@
           <a:p>
             <a:pPr lvl="0"/>
             <a:r>
-              <a:rPr lang="en-US" smtClean="0"/>
+              <a:rPr lang="en-US"/>
               <a:t>Click to edit Master text styles</a:t>
             </a:r>
           </a:p>
           <a:p>
             <a:pPr lvl="1"/>
             <a:r>
-              <a:rPr lang="en-US" smtClean="0"/>
+              <a:rPr lang="en-US"/>
               <a:t>Second level</a:t>
             </a:r>
           </a:p>
           <a:p>
             <a:pPr lvl="2"/>
             <a:r>
-              <a:rPr lang="en-US" smtClean="0"/>
+              <a:rPr lang="en-US"/>
               <a:t>Third level</a:t>
             </a:r>
           </a:p>
           <a:p>
             <a:pPr lvl="3"/>
             <a:r>
-              <a:rPr lang="en-US" smtClean="0"/>
+              <a:rPr lang="en-US"/>
               <a:t>Fourth level</a:t>
             </a:r>
           </a:p>
           <a:p>
             <a:pPr lvl="4"/>
             <a:r>
-              <a:rPr lang="en-US" smtClean="0"/>
+              <a:rPr lang="en-US"/>
               <a:t>Fifth level</a:t>
             </a:r>
-            <a:endParaRPr lang="en-US"/>
           </a:p>
         </p:txBody>
       </p:sp>
@@ -2401,7 +2183,7 @@
           <a:p>
             <a:fld id="{5BCAD085-E8A6-8845-BD4E-CB4CCA059FC4}" type="datetimeFigureOut">
               <a:rPr lang="en-US" smtClean="0"/>
-              <a:t>1/27/13</a:t>
+              <a:t>6/10/2026</a:t>
             </a:fld>
             <a:endParaRPr lang="en-US"/>
           </a:p>
@@ -2499,10 +2281,9 @@
           </a:lstStyle>
           <a:p>
             <a:r>
-              <a:rPr lang="en-US" smtClean="0"/>
+              <a:rPr lang="en-US"/>
               <a:t>Click to edit Master title style</a:t>
             </a:r>
-            <a:endParaRPr lang="en-US"/>
           </a:p>
         </p:txBody>
       </p:sp>
@@ -2565,7 +2346,7 @@
           <a:p>
             <a:pPr lvl="0"/>
             <a:r>
-              <a:rPr lang="en-US" smtClean="0"/>
+              <a:rPr lang="en-US"/>
               <a:t>Click to edit Master text styles</a:t>
             </a:r>
           </a:p>
@@ -2621,38 +2402,37 @@
           <a:p>
             <a:pPr lvl="0"/>
             <a:r>
-              <a:rPr lang="en-US" smtClean="0"/>
+              <a:rPr lang="en-US"/>
               <a:t>Click to edit Master text styles</a:t>
             </a:r>
           </a:p>
           <a:p>
             <a:pPr lvl="1"/>
             <a:r>
-              <a:rPr lang="en-US" smtClean="0"/>
+              <a:rPr lang="en-US"/>
               <a:t>Second level</a:t>
             </a:r>
           </a:p>
           <a:p>
             <a:pPr lvl="2"/>
             <a:r>
-              <a:rPr lang="en-US" smtClean="0"/>
+              <a:rPr lang="en-US"/>
               <a:t>Third level</a:t>
             </a:r>
           </a:p>
           <a:p>
             <a:pPr lvl="3"/>
             <a:r>
-              <a:rPr lang="en-US" smtClean="0"/>
+              <a:rPr lang="en-US"/>
               <a:t>Fourth level</a:t>
             </a:r>
           </a:p>
           <a:p>
             <a:pPr lvl="4"/>
             <a:r>
-              <a:rPr lang="en-US" smtClean="0"/>
+              <a:rPr lang="en-US"/>
               <a:t>Fifth level</a:t>
             </a:r>
-            <a:endParaRPr lang="en-US"/>
           </a:p>
         </p:txBody>
       </p:sp>
@@ -2715,7 +2495,7 @@
           <a:p>
             <a:pPr lvl="0"/>
             <a:r>
-              <a:rPr lang="en-US" smtClean="0"/>
+              <a:rPr lang="en-US"/>
               <a:t>Click to edit Master text styles</a:t>
             </a:r>
           </a:p>
@@ -2771,38 +2551,37 @@
           <a:p>
             <a:pPr lvl="0"/>
             <a:r>
-              <a:rPr lang="en-US" smtClean="0"/>
+              <a:rPr lang="en-US"/>
               <a:t>Click to edit Master text styles</a:t>
             </a:r>
           </a:p>
           <a:p>
             <a:pPr lvl="1"/>
             <a:r>
-              <a:rPr lang="en-US" smtClean="0"/>
+              <a:rPr lang="en-US"/>
               <a:t>Second level</a:t>
             </a:r>
           </a:p>
           <a:p>
             <a:pPr lvl="2"/>
             <a:r>
-              <a:rPr lang="en-US" smtClean="0"/>
+              <a:rPr lang="en-US"/>
               <a:t>Third level</a:t>
             </a:r>
           </a:p>
           <a:p>
             <a:pPr lvl="3"/>
             <a:r>
-              <a:rPr lang="en-US" smtClean="0"/>
+              <a:rPr lang="en-US"/>
               <a:t>Fourth level</a:t>
             </a:r>
           </a:p>
           <a:p>
             <a:pPr lvl="4"/>
             <a:r>
-              <a:rPr lang="en-US" smtClean="0"/>
+              <a:rPr lang="en-US"/>
               <a:t>Fifth level</a:t>
             </a:r>
-            <a:endParaRPr lang="en-US"/>
           </a:p>
         </p:txBody>
       </p:sp>
@@ -2823,7 +2602,7 @@
           <a:p>
             <a:fld id="{5BCAD085-E8A6-8845-BD4E-CB4CCA059FC4}" type="datetimeFigureOut">
               <a:rPr lang="en-US" smtClean="0"/>
-              <a:t>1/27/13</a:t>
+              <a:t>6/10/2026</a:t>
             </a:fld>
             <a:endParaRPr lang="en-US"/>
           </a:p>
@@ -2917,10 +2696,9 @@
           <a:lstStyle/>
           <a:p>
             <a:r>
-              <a:rPr lang="en-US" smtClean="0"/>
+              <a:rPr lang="en-US"/>
               <a:t>Click to edit Master title style</a:t>
             </a:r>
-            <a:endParaRPr lang="en-US"/>
           </a:p>
         </p:txBody>
       </p:sp>
@@ -2941,7 +2719,7 @@
           <a:p>
             <a:fld id="{5BCAD085-E8A6-8845-BD4E-CB4CCA059FC4}" type="datetimeFigureOut">
               <a:rPr lang="en-US" smtClean="0"/>
-              <a:t>1/27/13</a:t>
+              <a:t>6/10/2026</a:t>
             </a:fld>
             <a:endParaRPr lang="en-US"/>
           </a:p>
@@ -3036,7 +2814,7 @@
           <a:p>
             <a:fld id="{5BCAD085-E8A6-8845-BD4E-CB4CCA059FC4}" type="datetimeFigureOut">
               <a:rPr lang="en-US" smtClean="0"/>
-              <a:t>1/27/13</a:t>
+              <a:t>6/10/2026</a:t>
             </a:fld>
             <a:endParaRPr lang="en-US"/>
           </a:p>
@@ -3139,10 +2917,9 @@
           </a:lstStyle>
           <a:p>
             <a:r>
-              <a:rPr lang="en-US" smtClean="0"/>
+              <a:rPr lang="en-US"/>
               <a:t>Click to edit Master title style</a:t>
             </a:r>
-            <a:endParaRPr lang="en-US"/>
           </a:p>
         </p:txBody>
       </p:sp>
@@ -3196,38 +2973,37 @@
           <a:p>
             <a:pPr lvl="0"/>
             <a:r>
-              <a:rPr lang="en-US" smtClean="0"/>
+              <a:rPr lang="en-US"/>
               <a:t>Click to edit Master text styles</a:t>
             </a:r>
           </a:p>
           <a:p>
             <a:pPr lvl="1"/>
             <a:r>
-              <a:rPr lang="en-US" smtClean="0"/>
+              <a:rPr lang="en-US"/>
               <a:t>Second level</a:t>
             </a:r>
           </a:p>
           <a:p>
             <a:pPr lvl="2"/>
             <a:r>
-              <a:rPr lang="en-US" smtClean="0"/>
+              <a:rPr lang="en-US"/>
               <a:t>Third level</a:t>
             </a:r>
           </a:p>
           <a:p>
             <a:pPr lvl="3"/>
             <a:r>
-              <a:rPr lang="en-US" smtClean="0"/>
+              <a:rPr lang="en-US"/>
               <a:t>Fourth level</a:t>
             </a:r>
           </a:p>
           <a:p>
             <a:pPr lvl="4"/>
             <a:r>
-              <a:rPr lang="en-US" smtClean="0"/>
+              <a:rPr lang="en-US"/>
               <a:t>Fifth level</a:t>
             </a:r>
-            <a:endParaRPr lang="en-US"/>
           </a:p>
         </p:txBody>
       </p:sp>
@@ -3290,7 +3066,7 @@
           <a:p>
             <a:pPr lvl="0"/>
             <a:r>
-              <a:rPr lang="en-US" smtClean="0"/>
+              <a:rPr lang="en-US"/>
               <a:t>Click to edit Master text styles</a:t>
             </a:r>
           </a:p>
@@ -3313,7 +3089,7 @@
           <a:p>
             <a:fld id="{5BCAD085-E8A6-8845-BD4E-CB4CCA059FC4}" type="datetimeFigureOut">
               <a:rPr lang="en-US" smtClean="0"/>
-              <a:t>1/27/13</a:t>
+              <a:t>6/10/2026</a:t>
             </a:fld>
             <a:endParaRPr lang="en-US"/>
           </a:p>
@@ -3416,10 +3192,9 @@
           </a:lstStyle>
           <a:p>
             <a:r>
-              <a:rPr lang="en-US" smtClean="0"/>
+              <a:rPr lang="en-US"/>
               <a:t>Click to edit Master title style</a:t>
             </a:r>
-            <a:endParaRPr lang="en-US"/>
           </a:p>
         </p:txBody>
       </p:sp>
@@ -3543,7 +3318,7 @@
           <a:p>
             <a:pPr lvl="0"/>
             <a:r>
-              <a:rPr lang="en-US" smtClean="0"/>
+              <a:rPr lang="en-US"/>
               <a:t>Click to edit Master text styles</a:t>
             </a:r>
           </a:p>
@@ -3566,7 +3341,7 @@
           <a:p>
             <a:fld id="{5BCAD085-E8A6-8845-BD4E-CB4CCA059FC4}" type="datetimeFigureOut">
               <a:rPr lang="en-US" smtClean="0"/>
-              <a:t>1/27/13</a:t>
+              <a:t>6/10/2026</a:t>
             </a:fld>
             <a:endParaRPr lang="en-US"/>
           </a:p>
@@ -3675,10 +3450,9 @@
           <a:lstStyle/>
           <a:p>
             <a:r>
-              <a:rPr lang="en-US" smtClean="0"/>
+              <a:rPr lang="en-US"/>
               <a:t>Click to edit Master title style</a:t>
             </a:r>
-            <a:endParaRPr lang="en-US"/>
           </a:p>
         </p:txBody>
       </p:sp>
@@ -3709,38 +3483,37 @@
           <a:p>
             <a:pPr lvl="0"/>
             <a:r>
-              <a:rPr lang="en-US" smtClean="0"/>
+              <a:rPr lang="en-US"/>
               <a:t>Click to edit Master text styles</a:t>
             </a:r>
           </a:p>
           <a:p>
             <a:pPr lvl="1"/>
             <a:r>
-              <a:rPr lang="en-US" smtClean="0"/>
+              <a:rPr lang="en-US"/>
               <a:t>Second level</a:t>
             </a:r>
           </a:p>
           <a:p>
             <a:pPr lvl="2"/>
             <a:r>
-              <a:rPr lang="en-US" smtClean="0"/>
+              <a:rPr lang="en-US"/>
               <a:t>Third level</a:t>
             </a:r>
           </a:p>
           <a:p>
             <a:pPr lvl="3"/>
             <a:r>
-              <a:rPr lang="en-US" smtClean="0"/>
+              <a:rPr lang="en-US"/>
               <a:t>Fourth level</a:t>
             </a:r>
           </a:p>
           <a:p>
             <a:pPr lvl="4"/>
             <a:r>
-              <a:rPr lang="en-US" smtClean="0"/>
+              <a:rPr lang="en-US"/>
               <a:t>Fifth level</a:t>
             </a:r>
-            <a:endParaRPr lang="en-US"/>
           </a:p>
         </p:txBody>
       </p:sp>
@@ -3779,7 +3552,7 @@
           <a:p>
             <a:fld id="{5BCAD085-E8A6-8845-BD4E-CB4CCA059FC4}" type="datetimeFigureOut">
               <a:rPr lang="en-US" smtClean="0"/>
-              <a:t>1/27/13</a:t>
+              <a:t>6/10/2026</a:t>
             </a:fld>
             <a:endParaRPr lang="en-US"/>
           </a:p>
@@ -4138,7 +3911,7 @@
 </file>
 
 <file path=ppt/slides/slide1.xml><?xml version="1.0" encoding="utf-8"?>
-<p:sld xmlns:a="http://schemas.openxmlformats.org/drawingml/2006/main" xmlns:p="http://schemas.openxmlformats.org/presentationml/2006/main" xmlns:r="http://schemas.openxmlformats.org/officeDocument/2006/relationships">
+<p:sld xmlns:a="http://schemas.openxmlformats.org/drawingml/2006/main" xmlns:r="http://schemas.openxmlformats.org/officeDocument/2006/relationships" xmlns:p="http://schemas.openxmlformats.org/presentationml/2006/main">
   <p:cSld>
     <p:bg>
       <p:bgPr>
@@ -4154,7 +3927,14 @@
         <p:cNvGrpSpPr/>
         <p:nvPr/>
       </p:nvGrpSpPr>
-      <p:grpSpPr/>
+      <p:grpSpPr>
+        <a:xfrm>
+          <a:off x="0" y="0"/>
+          <a:ext cx="0" cy="0"/>
+          <a:chOff x="0" y="0"/>
+          <a:chExt cx="0" cy="0"/>
+        </a:xfrm>
+      </p:grpSpPr>
       <p:sp>
         <p:nvSpPr>
           <p:cNvPr id="2" name="Rounded Rectangle 1"/>
@@ -4196,6 +3976,7 @@
           <a:lstStyle/>
           <a:p>
             <a:pPr algn="ctr"/>
+            <a:endParaRPr dirty="0"/>
           </a:p>
         </p:txBody>
       </p:sp>
@@ -4207,7 +3988,7 @@
         </p:nvSpPr>
         <p:spPr>
           <a:xfrm>
-            <a:off x="685800" y="3050000"/>
+            <a:off x="84666" y="188000"/>
             <a:ext cx="9000000" cy="360000"/>
           </a:xfrm>
           <a:prstGeom prst="rect">
@@ -4222,7 +4003,7 @@
           <a:lstStyle/>
           <a:p>
             <a:r>
-              <a:rPr sz="1200" b="1" i="0" spc="40">
+              <a:rPr sz="1200" b="1" i="0" spc="40" dirty="0">
                 <a:solidFill>
                   <a:srgbClr val="828FFF"/>
                 </a:solidFill>
@@ -4241,7 +4022,7 @@
         </p:nvSpPr>
         <p:spPr>
           <a:xfrm>
-            <a:off x="685800" y="3350000"/>
+            <a:off x="1392000" y="2130267"/>
             <a:ext cx="10800000" cy="1700000"/>
           </a:xfrm>
           <a:prstGeom prst="rect">
@@ -4256,7 +4037,7 @@
           <a:lstStyle/>
           <a:p>
             <a:r>
-              <a:rPr sz="5400" b="1" i="0" spc="-200">
+              <a:rPr sz="5400" b="1" i="0" spc="-200" dirty="0">
                 <a:solidFill>
                   <a:srgbClr val="F7F8F8"/>
                 </a:solidFill>
@@ -4267,7 +4048,7 @@
           </a:p>
           <a:p>
             <a:r>
-              <a:rPr sz="5400" b="1" i="0" spc="-200">
+              <a:rPr sz="5400" b="1" i="0" spc="-200" dirty="0">
                 <a:solidFill>
                   <a:srgbClr val="F7F8F8"/>
                 </a:solidFill>
@@ -4320,8 +4101,8 @@
         </p:nvSpPr>
         <p:spPr>
           <a:xfrm>
-            <a:off x="685800" y="5750000"/>
-            <a:ext cx="1900000" cy="560000"/>
+            <a:off x="159733" y="5850000"/>
+            <a:ext cx="1786467" cy="460000"/>
           </a:xfrm>
           <a:prstGeom prst="roundRect">
             <a:avLst/>
@@ -4351,7 +4132,7 @@
           </a:fontRef>
         </p:style>
         <p:txBody>
-          <a:bodyPr rtlCol="0" anchor="ctr" wrap="square" lIns="140000" rIns="120000"/>
+          <a:bodyPr wrap="square" lIns="140000" rIns="120000" rtlCol="0" anchor="ctr"/>
           <a:lstStyle/>
           <a:p>
             <a:pPr algn="ctr"/>
@@ -4375,7 +4156,7 @@
         </p:nvSpPr>
         <p:spPr>
           <a:xfrm>
-            <a:off x="2625800" y="5850000"/>
+            <a:off x="2165800" y="5900000"/>
             <a:ext cx="420000" cy="360000"/>
           </a:xfrm>
           <a:prstGeom prst="rightArrow">
@@ -4408,6 +4189,7 @@
           <a:lstStyle/>
           <a:p>
             <a:pPr algn="ctr"/>
+            <a:endParaRPr/>
           </a:p>
         </p:txBody>
       </p:sp>
@@ -4419,8 +4201,8 @@
         </p:nvSpPr>
         <p:spPr>
           <a:xfrm>
-            <a:off x="3085800" y="5750000"/>
-            <a:ext cx="1900000" cy="560000"/>
+            <a:off x="2766000" y="5856400"/>
+            <a:ext cx="1620200" cy="460000"/>
           </a:xfrm>
           <a:prstGeom prst="roundRect">
             <a:avLst/>
@@ -4450,7 +4232,7 @@
           </a:fontRef>
         </p:style>
         <p:txBody>
-          <a:bodyPr rtlCol="0" anchor="ctr" wrap="square" lIns="140000" rIns="120000"/>
+          <a:bodyPr wrap="square" lIns="140000" rIns="120000" rtlCol="0" anchor="ctr"/>
           <a:lstStyle/>
           <a:p>
             <a:pPr algn="ctr"/>
@@ -4474,7 +4256,7 @@
         </p:nvSpPr>
         <p:spPr>
           <a:xfrm>
-            <a:off x="5025800" y="5850000"/>
+            <a:off x="4565800" y="5950000"/>
             <a:ext cx="420000" cy="360000"/>
           </a:xfrm>
           <a:prstGeom prst="rightArrow">
@@ -4507,6 +4289,7 @@
           <a:lstStyle/>
           <a:p>
             <a:pPr algn="ctr"/>
+            <a:endParaRPr dirty="0"/>
           </a:p>
         </p:txBody>
       </p:sp>
@@ -4518,7 +4301,7 @@
         </p:nvSpPr>
         <p:spPr>
           <a:xfrm>
-            <a:off x="5485800" y="5750000"/>
+            <a:off x="5146000" y="5866600"/>
             <a:ext cx="1900000" cy="560000"/>
           </a:xfrm>
           <a:prstGeom prst="roundRect">
@@ -4549,7 +4332,7 @@
           </a:fontRef>
         </p:style>
         <p:txBody>
-          <a:bodyPr rtlCol="0" anchor="ctr" wrap="square" lIns="140000" rIns="120000"/>
+          <a:bodyPr wrap="square" lIns="140000" rIns="120000" rtlCol="0" anchor="ctr"/>
           <a:lstStyle/>
           <a:p>
             <a:pPr algn="ctr"/>
@@ -4573,7 +4356,7 @@
         </p:nvSpPr>
         <p:spPr>
           <a:xfrm>
-            <a:off x="7425800" y="5850000"/>
+            <a:off x="7215800" y="5950000"/>
             <a:ext cx="420000" cy="360000"/>
           </a:xfrm>
           <a:prstGeom prst="rightArrow">
@@ -4606,6 +4389,7 @@
           <a:lstStyle/>
           <a:p>
             <a:pPr algn="ctr"/>
+            <a:endParaRPr/>
           </a:p>
         </p:txBody>
       </p:sp>
@@ -4617,7 +4401,7 @@
         </p:nvSpPr>
         <p:spPr>
           <a:xfrm>
-            <a:off x="7885800" y="5750000"/>
+            <a:off x="7780800" y="5889467"/>
             <a:ext cx="1900000" cy="560000"/>
           </a:xfrm>
           <a:prstGeom prst="roundRect">
@@ -4648,7 +4432,7 @@
           </a:fontRef>
         </p:style>
         <p:txBody>
-          <a:bodyPr rtlCol="0" anchor="ctr" wrap="square" lIns="140000" rIns="120000"/>
+          <a:bodyPr wrap="square" lIns="140000" rIns="120000" rtlCol="0" anchor="ctr"/>
           <a:lstStyle/>
           <a:p>
             <a:pPr algn="ctr"/>
@@ -4672,7 +4456,7 @@
         </p:nvSpPr>
         <p:spPr>
           <a:xfrm>
-            <a:off x="9825800" y="5850000"/>
+            <a:off x="9767633" y="5950000"/>
             <a:ext cx="420000" cy="360000"/>
           </a:xfrm>
           <a:prstGeom prst="rightArrow">
@@ -4705,6 +4489,7 @@
           <a:lstStyle/>
           <a:p>
             <a:pPr algn="ctr"/>
+            <a:endParaRPr/>
           </a:p>
         </p:txBody>
       </p:sp>
@@ -4716,8 +4501,8 @@
         </p:nvSpPr>
         <p:spPr>
           <a:xfrm>
-            <a:off x="10285800" y="5750000"/>
-            <a:ext cx="1900000" cy="560000"/>
+            <a:off x="10412067" y="5950000"/>
+            <a:ext cx="1620200" cy="510000"/>
           </a:xfrm>
           <a:prstGeom prst="roundRect">
             <a:avLst/>
@@ -4747,7 +4532,7 @@
           </a:fontRef>
         </p:style>
         <p:txBody>
-          <a:bodyPr rtlCol="0" anchor="ctr" wrap="square" lIns="140000" rIns="120000"/>
+          <a:bodyPr wrap="square" lIns="140000" rIns="120000" rtlCol="0" anchor="ctr"/>
           <a:lstStyle/>
           <a:p>
             <a:pPr algn="ctr"/>
@@ -4772,7 +4557,7 @@
 </file>
 
 <file path=ppt/slides/slide10.xml><?xml version="1.0" encoding="utf-8"?>
-<p:sld xmlns:a="http://schemas.openxmlformats.org/drawingml/2006/main" xmlns:p="http://schemas.openxmlformats.org/presentationml/2006/main" xmlns:r="http://schemas.openxmlformats.org/officeDocument/2006/relationships">
+<p:sld xmlns:a="http://schemas.openxmlformats.org/drawingml/2006/main" xmlns:r="http://schemas.openxmlformats.org/officeDocument/2006/relationships" xmlns:p="http://schemas.openxmlformats.org/presentationml/2006/main">
   <p:cSld>
     <p:bg>
       <p:bgPr>
@@ -4788,7 +4573,14 @@
         <p:cNvGrpSpPr/>
         <p:nvPr/>
       </p:nvGrpSpPr>
-      <p:grpSpPr/>
+      <p:grpSpPr>
+        <a:xfrm>
+          <a:off x="0" y="0"/>
+          <a:ext cx="0" cy="0"/>
+          <a:chOff x="0" y="0"/>
+          <a:chExt cx="0" cy="0"/>
+        </a:xfrm>
+      </p:grpSpPr>
       <p:sp>
         <p:nvSpPr>
           <p:cNvPr id="2" name="TextBox 1"/>
@@ -4896,7 +4688,7 @@
           </a:fontRef>
         </p:style>
         <p:txBody>
-          <a:bodyPr rtlCol="0" anchor="ctr" wrap="square" lIns="220000" tIns="200000"/>
+          <a:bodyPr wrap="square" lIns="220000" tIns="200000" rtlCol="0" anchor="ctr"/>
           <a:lstStyle/>
           <a:p>
             <a:pPr algn="ctr"/>
@@ -5051,7 +4843,7 @@
           </a:fontRef>
         </p:style>
         <p:txBody>
-          <a:bodyPr rtlCol="0" anchor="ctr" wrap="square" lIns="220000" tIns="200000"/>
+          <a:bodyPr wrap="square" lIns="220000" tIns="200000" rtlCol="0" anchor="ctr"/>
           <a:lstStyle/>
           <a:p>
             <a:pPr algn="ctr"/>
@@ -5176,7 +4968,7 @@
 </file>
 
 <file path=ppt/slides/slide2.xml><?xml version="1.0" encoding="utf-8"?>
-<p:sld xmlns:a="http://schemas.openxmlformats.org/drawingml/2006/main" xmlns:p="http://schemas.openxmlformats.org/presentationml/2006/main" xmlns:r="http://schemas.openxmlformats.org/officeDocument/2006/relationships">
+<p:sld xmlns:a="http://schemas.openxmlformats.org/drawingml/2006/main" xmlns:r="http://schemas.openxmlformats.org/officeDocument/2006/relationships" xmlns:p="http://schemas.openxmlformats.org/presentationml/2006/main">
   <p:cSld>
     <p:bg>
       <p:bgPr>
@@ -5192,7 +4984,14 @@
         <p:cNvGrpSpPr/>
         <p:nvPr/>
       </p:nvGrpSpPr>
-      <p:grpSpPr/>
+      <p:grpSpPr>
+        <a:xfrm>
+          <a:off x="0" y="0"/>
+          <a:ext cx="0" cy="0"/>
+          <a:chOff x="0" y="0"/>
+          <a:chExt cx="0" cy="0"/>
+        </a:xfrm>
+      </p:grpSpPr>
       <p:sp>
         <p:nvSpPr>
           <p:cNvPr id="2" name="TextBox 1"/>
@@ -5300,7 +5099,7 @@
           </a:fontRef>
         </p:style>
         <p:txBody>
-          <a:bodyPr rtlCol="0" anchor="ctr" wrap="square" lIns="220000" tIns="220000" rIns="200000"/>
+          <a:bodyPr wrap="square" lIns="220000" tIns="220000" rIns="200000" rtlCol="0" anchor="ctr"/>
           <a:lstStyle/>
           <a:p>
             <a:pPr algn="ctr"/>
@@ -5371,7 +5170,7 @@
           </a:fontRef>
         </p:style>
         <p:txBody>
-          <a:bodyPr rtlCol="0" anchor="ctr" wrap="square" lIns="220000" tIns="220000" rIns="200000"/>
+          <a:bodyPr wrap="square" lIns="220000" tIns="220000" rIns="200000" rtlCol="0" anchor="ctr"/>
           <a:lstStyle/>
           <a:p>
             <a:pPr algn="ctr"/>
@@ -5442,7 +5241,7 @@
           </a:fontRef>
         </p:style>
         <p:txBody>
-          <a:bodyPr rtlCol="0" anchor="ctr" wrap="square" lIns="220000" tIns="220000" rIns="200000"/>
+          <a:bodyPr wrap="square" lIns="220000" tIns="220000" rIns="200000" rtlCol="0" anchor="ctr"/>
           <a:lstStyle/>
           <a:p>
             <a:pPr algn="ctr"/>
@@ -5517,7 +5316,7 @@
 </file>
 
 <file path=ppt/slides/slide3.xml><?xml version="1.0" encoding="utf-8"?>
-<p:sld xmlns:a="http://schemas.openxmlformats.org/drawingml/2006/main" xmlns:p="http://schemas.openxmlformats.org/presentationml/2006/main" xmlns:r="http://schemas.openxmlformats.org/officeDocument/2006/relationships">
+<p:sld xmlns:a="http://schemas.openxmlformats.org/drawingml/2006/main" xmlns:r="http://schemas.openxmlformats.org/officeDocument/2006/relationships" xmlns:p="http://schemas.openxmlformats.org/presentationml/2006/main">
   <p:cSld>
     <p:bg>
       <p:bgPr>
@@ -5533,7 +5332,14 @@
         <p:cNvGrpSpPr/>
         <p:nvPr/>
       </p:nvGrpSpPr>
-      <p:grpSpPr/>
+      <p:grpSpPr>
+        <a:xfrm>
+          <a:off x="0" y="0"/>
+          <a:ext cx="0" cy="0"/>
+          <a:chOff x="0" y="0"/>
+          <a:chExt cx="0" cy="0"/>
+        </a:xfrm>
+      </p:grpSpPr>
       <p:sp>
         <p:nvSpPr>
           <p:cNvPr id="2" name="TextBox 1"/>
@@ -5734,7 +5540,7 @@
 </file>
 
 <file path=ppt/slides/slide4.xml><?xml version="1.0" encoding="utf-8"?>
-<p:sld xmlns:a="http://schemas.openxmlformats.org/drawingml/2006/main" xmlns:p="http://schemas.openxmlformats.org/presentationml/2006/main" xmlns:r="http://schemas.openxmlformats.org/officeDocument/2006/relationships">
+<p:sld xmlns:a="http://schemas.openxmlformats.org/drawingml/2006/main" xmlns:r="http://schemas.openxmlformats.org/officeDocument/2006/relationships" xmlns:p="http://schemas.openxmlformats.org/presentationml/2006/main">
   <p:cSld>
     <p:bg>
       <p:bgPr>
@@ -5750,7 +5556,14 @@
         <p:cNvGrpSpPr/>
         <p:nvPr/>
       </p:nvGrpSpPr>
-      <p:grpSpPr/>
+      <p:grpSpPr>
+        <a:xfrm>
+          <a:off x="0" y="0"/>
+          <a:ext cx="0" cy="0"/>
+          <a:chOff x="0" y="0"/>
+          <a:chExt cx="0" cy="0"/>
+        </a:xfrm>
+      </p:grpSpPr>
       <p:sp>
         <p:nvSpPr>
           <p:cNvPr id="2" name="TextBox 1"/>
@@ -5858,7 +5671,7 @@
           </a:fontRef>
         </p:style>
         <p:txBody>
-          <a:bodyPr rtlCol="0" anchor="ctr" wrap="square" lIns="180000" tIns="170000"/>
+          <a:bodyPr wrap="square" lIns="180000" tIns="170000" rtlCol="0" anchor="ctr"/>
           <a:lstStyle/>
           <a:p>
             <a:pPr algn="ctr"/>
@@ -5932,6 +5745,7 @@
           <a:lstStyle/>
           <a:p>
             <a:pPr algn="ctr"/>
+            <a:endParaRPr/>
           </a:p>
         </p:txBody>
       </p:sp>
@@ -5974,7 +5788,7 @@
           </a:fontRef>
         </p:style>
         <p:txBody>
-          <a:bodyPr rtlCol="0" anchor="ctr" wrap="square" lIns="180000" tIns="170000"/>
+          <a:bodyPr wrap="square" lIns="180000" tIns="170000" rtlCol="0" anchor="ctr"/>
           <a:lstStyle/>
           <a:p>
             <a:pPr algn="ctr"/>
@@ -6049,6 +5863,7 @@
           <a:lstStyle/>
           <a:p>
             <a:pPr algn="ctr"/>
+            <a:endParaRPr/>
           </a:p>
         </p:txBody>
       </p:sp>
@@ -6091,7 +5906,7 @@
           </a:fontRef>
         </p:style>
         <p:txBody>
-          <a:bodyPr rtlCol="0" anchor="ctr" wrap="square" lIns="180000" tIns="170000"/>
+          <a:bodyPr wrap="square" lIns="180000" tIns="170000" rtlCol="0" anchor="ctr"/>
           <a:lstStyle/>
           <a:p>
             <a:pPr algn="ctr"/>
@@ -6165,6 +5980,7 @@
           <a:lstStyle/>
           <a:p>
             <a:pPr algn="ctr"/>
+            <a:endParaRPr/>
           </a:p>
         </p:txBody>
       </p:sp>
@@ -6207,7 +6023,7 @@
           </a:fontRef>
         </p:style>
         <p:txBody>
-          <a:bodyPr rtlCol="0" anchor="ctr" wrap="square" lIns="180000" tIns="170000"/>
+          <a:bodyPr wrap="square" lIns="180000" tIns="170000" rtlCol="0" anchor="ctr"/>
           <a:lstStyle/>
           <a:p>
             <a:pPr algn="ctr"/>
@@ -6283,7 +6099,7 @@
 </file>
 
 <file path=ppt/slides/slide5.xml><?xml version="1.0" encoding="utf-8"?>
-<p:sld xmlns:a="http://schemas.openxmlformats.org/drawingml/2006/main" xmlns:p="http://schemas.openxmlformats.org/presentationml/2006/main" xmlns:r="http://schemas.openxmlformats.org/officeDocument/2006/relationships">
+<p:sld xmlns:a="http://schemas.openxmlformats.org/drawingml/2006/main" xmlns:r="http://schemas.openxmlformats.org/officeDocument/2006/relationships" xmlns:p="http://schemas.openxmlformats.org/presentationml/2006/main">
   <p:cSld>
     <p:bg>
       <p:bgPr>
@@ -6299,7 +6115,14 @@
         <p:cNvGrpSpPr/>
         <p:nvPr/>
       </p:nvGrpSpPr>
-      <p:grpSpPr/>
+      <p:grpSpPr>
+        <a:xfrm>
+          <a:off x="0" y="0"/>
+          <a:ext cx="0" cy="0"/>
+          <a:chOff x="0" y="0"/>
+          <a:chExt cx="0" cy="0"/>
+        </a:xfrm>
+      </p:grpSpPr>
       <p:sp>
         <p:nvSpPr>
           <p:cNvPr id="2" name="TextBox 1"/>
@@ -6407,7 +6230,7 @@
           </a:fontRef>
         </p:style>
         <p:txBody>
-          <a:bodyPr rtlCol="0" anchor="ctr" wrap="square" lIns="200000" tIns="160000" rIns="180000"/>
+          <a:bodyPr wrap="square" lIns="200000" tIns="160000" rIns="180000" rtlCol="0" anchor="ctr"/>
           <a:lstStyle/>
           <a:p>
             <a:pPr algn="ctr"/>
@@ -6478,7 +6301,7 @@
           </a:fontRef>
         </p:style>
         <p:txBody>
-          <a:bodyPr rtlCol="0" anchor="ctr" wrap="square" lIns="200000" tIns="160000" rIns="180000"/>
+          <a:bodyPr wrap="square" lIns="200000" tIns="160000" rIns="180000" rtlCol="0" anchor="ctr"/>
           <a:lstStyle/>
           <a:p>
             <a:pPr algn="ctr"/>
@@ -6549,7 +6372,7 @@
           </a:fontRef>
         </p:style>
         <p:txBody>
-          <a:bodyPr rtlCol="0" anchor="ctr" wrap="square" lIns="200000" tIns="160000" rIns="180000"/>
+          <a:bodyPr wrap="square" lIns="200000" tIns="160000" rIns="180000" rtlCol="0" anchor="ctr"/>
           <a:lstStyle/>
           <a:p>
             <a:pPr algn="ctr"/>
@@ -6620,7 +6443,7 @@
           </a:fontRef>
         </p:style>
         <p:txBody>
-          <a:bodyPr rtlCol="0" anchor="ctr" wrap="square" lIns="200000" tIns="160000" rIns="180000"/>
+          <a:bodyPr wrap="square" lIns="200000" tIns="160000" rIns="180000" rtlCol="0" anchor="ctr"/>
           <a:lstStyle/>
           <a:p>
             <a:pPr algn="ctr"/>
@@ -6661,7 +6484,7 @@
 </file>
 
 <file path=ppt/slides/slide6.xml><?xml version="1.0" encoding="utf-8"?>
-<p:sld xmlns:a="http://schemas.openxmlformats.org/drawingml/2006/main" xmlns:p="http://schemas.openxmlformats.org/presentationml/2006/main" xmlns:r="http://schemas.openxmlformats.org/officeDocument/2006/relationships">
+<p:sld xmlns:a="http://schemas.openxmlformats.org/drawingml/2006/main" xmlns:r="http://schemas.openxmlformats.org/officeDocument/2006/relationships" xmlns:p="http://schemas.openxmlformats.org/presentationml/2006/main">
   <p:cSld>
     <p:bg>
       <p:bgPr>
@@ -6677,7 +6500,14 @@
         <p:cNvGrpSpPr/>
         <p:nvPr/>
       </p:nvGrpSpPr>
-      <p:grpSpPr/>
+      <p:grpSpPr>
+        <a:xfrm>
+          <a:off x="0" y="0"/>
+          <a:ext cx="0" cy="0"/>
+          <a:chOff x="0" y="0"/>
+          <a:chExt cx="0" cy="0"/>
+        </a:xfrm>
+      </p:grpSpPr>
       <p:sp>
         <p:nvSpPr>
           <p:cNvPr id="2" name="TextBox 1"/>
@@ -6908,7 +6738,7 @@
           </a:fontRef>
         </p:style>
         <p:txBody>
-          <a:bodyPr rtlCol="0" anchor="ctr" wrap="square" lIns="220000" tIns="200000"/>
+          <a:bodyPr wrap="square" lIns="220000" tIns="200000" rtlCol="0" anchor="ctr"/>
           <a:lstStyle/>
           <a:p>
             <a:pPr algn="ctr"/>
@@ -7030,7 +6860,7 @@
 </file>
 
 <file path=ppt/slides/slide7.xml><?xml version="1.0" encoding="utf-8"?>
-<p:sld xmlns:a="http://schemas.openxmlformats.org/drawingml/2006/main" xmlns:p="http://schemas.openxmlformats.org/presentationml/2006/main" xmlns:r="http://schemas.openxmlformats.org/officeDocument/2006/relationships">
+<p:sld xmlns:a="http://schemas.openxmlformats.org/drawingml/2006/main" xmlns:r="http://schemas.openxmlformats.org/officeDocument/2006/relationships" xmlns:p="http://schemas.openxmlformats.org/presentationml/2006/main">
   <p:cSld>
     <p:bg>
       <p:bgPr>
@@ -7046,7 +6876,14 @@
         <p:cNvGrpSpPr/>
         <p:nvPr/>
       </p:nvGrpSpPr>
-      <p:grpSpPr/>
+      <p:grpSpPr>
+        <a:xfrm>
+          <a:off x="0" y="0"/>
+          <a:ext cx="0" cy="0"/>
+          <a:chOff x="0" y="0"/>
+          <a:chExt cx="0" cy="0"/>
+        </a:xfrm>
+      </p:grpSpPr>
       <p:sp>
         <p:nvSpPr>
           <p:cNvPr id="2" name="TextBox 1"/>
@@ -7154,7 +6991,7 @@
           </a:fontRef>
         </p:style>
         <p:txBody>
-          <a:bodyPr rtlCol="0" anchor="ctr" lIns="220000"/>
+          <a:bodyPr lIns="220000" rtlCol="0" anchor="ctr"/>
           <a:lstStyle/>
           <a:p>
             <a:pPr algn="ctr"/>
@@ -7218,7 +7055,7 @@
           </a:fontRef>
         </p:style>
         <p:txBody>
-          <a:bodyPr rtlCol="0" anchor="ctr" lIns="220000"/>
+          <a:bodyPr lIns="220000" rtlCol="0" anchor="ctr"/>
           <a:lstStyle/>
           <a:p>
             <a:pPr algn="ctr"/>
@@ -7282,7 +7119,7 @@
           </a:fontRef>
         </p:style>
         <p:txBody>
-          <a:bodyPr rtlCol="0" anchor="ctr" lIns="220000"/>
+          <a:bodyPr lIns="220000" rtlCol="0" anchor="ctr"/>
           <a:lstStyle/>
           <a:p>
             <a:pPr algn="ctr"/>
@@ -7346,7 +7183,7 @@
           </a:fontRef>
         </p:style>
         <p:txBody>
-          <a:bodyPr rtlCol="0" anchor="ctr" lIns="220000"/>
+          <a:bodyPr lIns="220000" rtlCol="0" anchor="ctr"/>
           <a:lstStyle/>
           <a:p>
             <a:pPr algn="ctr"/>
@@ -7410,7 +7247,7 @@
           </a:fontRef>
         </p:style>
         <p:txBody>
-          <a:bodyPr rtlCol="0" anchor="ctr" lIns="220000"/>
+          <a:bodyPr lIns="220000" rtlCol="0" anchor="ctr"/>
           <a:lstStyle/>
           <a:p>
             <a:pPr algn="ctr"/>
@@ -7474,7 +7311,7 @@
           </a:fontRef>
         </p:style>
         <p:txBody>
-          <a:bodyPr rtlCol="0" anchor="ctr" lIns="220000"/>
+          <a:bodyPr lIns="220000" rtlCol="0" anchor="ctr"/>
           <a:lstStyle/>
           <a:p>
             <a:pPr algn="ctr"/>
@@ -7508,7 +7345,7 @@
 </file>
 
 <file path=ppt/slides/slide8.xml><?xml version="1.0" encoding="utf-8"?>
-<p:sld xmlns:a="http://schemas.openxmlformats.org/drawingml/2006/main" xmlns:p="http://schemas.openxmlformats.org/presentationml/2006/main" xmlns:r="http://schemas.openxmlformats.org/officeDocument/2006/relationships">
+<p:sld xmlns:a="http://schemas.openxmlformats.org/drawingml/2006/main" xmlns:r="http://schemas.openxmlformats.org/officeDocument/2006/relationships" xmlns:p="http://schemas.openxmlformats.org/presentationml/2006/main">
   <p:cSld>
     <p:bg>
       <p:bgPr>
@@ -7524,7 +7361,14 @@
         <p:cNvGrpSpPr/>
         <p:nvPr/>
       </p:nvGrpSpPr>
-      <p:grpSpPr/>
+      <p:grpSpPr>
+        <a:xfrm>
+          <a:off x="0" y="0"/>
+          <a:ext cx="0" cy="0"/>
+          <a:chOff x="0" y="0"/>
+          <a:chExt cx="0" cy="0"/>
+        </a:xfrm>
+      </p:grpSpPr>
       <p:sp>
         <p:nvSpPr>
           <p:cNvPr id="2" name="TextBox 1"/>
@@ -7632,7 +7476,7 @@
           </a:fontRef>
         </p:style>
         <p:txBody>
-          <a:bodyPr rtlCol="0" anchor="ctr" wrap="square" lIns="180000"/>
+          <a:bodyPr wrap="square" lIns="180000" rtlCol="0" anchor="ctr"/>
           <a:lstStyle/>
           <a:p>
             <a:pPr algn="ctr"/>
@@ -7687,7 +7531,7 @@
           </a:fontRef>
         </p:style>
         <p:txBody>
-          <a:bodyPr rtlCol="0" anchor="ctr" wrap="square" lIns="180000"/>
+          <a:bodyPr wrap="square" lIns="180000" rtlCol="0" anchor="ctr"/>
           <a:lstStyle/>
           <a:p>
             <a:pPr algn="ctr"/>
@@ -7742,7 +7586,7 @@
           </a:fontRef>
         </p:style>
         <p:txBody>
-          <a:bodyPr rtlCol="0" anchor="ctr" wrap="square" lIns="180000"/>
+          <a:bodyPr wrap="square" lIns="180000" rtlCol="0" anchor="ctr"/>
           <a:lstStyle/>
           <a:p>
             <a:pPr algn="ctr"/>
@@ -7797,7 +7641,7 @@
           </a:fontRef>
         </p:style>
         <p:txBody>
-          <a:bodyPr rtlCol="0" anchor="ctr" wrap="square" lIns="180000"/>
+          <a:bodyPr wrap="square" lIns="180000" rtlCol="0" anchor="ctr"/>
           <a:lstStyle/>
           <a:p>
             <a:pPr algn="ctr"/>
@@ -7852,7 +7696,7 @@
           </a:fontRef>
         </p:style>
         <p:txBody>
-          <a:bodyPr rtlCol="0" anchor="ctr" wrap="square" lIns="180000"/>
+          <a:bodyPr wrap="square" lIns="180000" rtlCol="0" anchor="ctr"/>
           <a:lstStyle/>
           <a:p>
             <a:pPr algn="ctr"/>
@@ -7907,7 +7751,7 @@
           </a:fontRef>
         </p:style>
         <p:txBody>
-          <a:bodyPr rtlCol="0" anchor="ctr" wrap="square" lIns="180000"/>
+          <a:bodyPr wrap="square" lIns="180000" rtlCol="0" anchor="ctr"/>
           <a:lstStyle/>
           <a:p>
             <a:pPr algn="ctr"/>
@@ -7962,7 +7806,7 @@
           </a:fontRef>
         </p:style>
         <p:txBody>
-          <a:bodyPr rtlCol="0" anchor="ctr" wrap="square" lIns="180000"/>
+          <a:bodyPr wrap="square" lIns="180000" rtlCol="0" anchor="ctr"/>
           <a:lstStyle/>
           <a:p>
             <a:pPr algn="ctr"/>
@@ -8017,7 +7861,7 @@
           </a:fontRef>
         </p:style>
         <p:txBody>
-          <a:bodyPr rtlCol="0" anchor="ctr" wrap="square" lIns="180000"/>
+          <a:bodyPr wrap="square" lIns="180000" rtlCol="0" anchor="ctr"/>
           <a:lstStyle/>
           <a:p>
             <a:pPr algn="ctr"/>
@@ -8042,7 +7886,7 @@
 </file>
 
 <file path=ppt/slides/slide9.xml><?xml version="1.0" encoding="utf-8"?>
-<p:sld xmlns:a="http://schemas.openxmlformats.org/drawingml/2006/main" xmlns:p="http://schemas.openxmlformats.org/presentationml/2006/main" xmlns:r="http://schemas.openxmlformats.org/officeDocument/2006/relationships">
+<p:sld xmlns:a="http://schemas.openxmlformats.org/drawingml/2006/main" xmlns:r="http://schemas.openxmlformats.org/officeDocument/2006/relationships" xmlns:p="http://schemas.openxmlformats.org/presentationml/2006/main">
   <p:cSld>
     <p:bg>
       <p:bgPr>
@@ -8058,7 +7902,14 @@
         <p:cNvGrpSpPr/>
         <p:nvPr/>
       </p:nvGrpSpPr>
-      <p:grpSpPr/>
+      <p:grpSpPr>
+        <a:xfrm>
+          <a:off x="0" y="0"/>
+          <a:ext cx="0" cy="0"/>
+          <a:chOff x="0" y="0"/>
+          <a:chExt cx="0" cy="0"/>
+        </a:xfrm>
+      </p:grpSpPr>
       <p:sp>
         <p:nvSpPr>
           <p:cNvPr id="2" name="TextBox 1"/>
@@ -8166,7 +8017,7 @@
           </a:fontRef>
         </p:style>
         <p:txBody>
-          <a:bodyPr rtlCol="0" anchor="ctr" wrap="square" lIns="200000" tIns="170000"/>
+          <a:bodyPr wrap="square" lIns="200000" tIns="170000" rtlCol="0" anchor="ctr"/>
           <a:lstStyle/>
           <a:p>
             <a:pPr algn="ctr"/>
@@ -8237,7 +8088,7 @@
           </a:fontRef>
         </p:style>
         <p:txBody>
-          <a:bodyPr rtlCol="0" anchor="ctr" wrap="square" lIns="200000" tIns="170000"/>
+          <a:bodyPr wrap="square" lIns="200000" tIns="170000" rtlCol="0" anchor="ctr"/>
           <a:lstStyle/>
           <a:p>
             <a:pPr algn="ctr"/>
@@ -8308,7 +8159,7 @@
           </a:fontRef>
         </p:style>
         <p:txBody>
-          <a:bodyPr rtlCol="0" anchor="ctr" wrap="square" lIns="200000" tIns="170000"/>
+          <a:bodyPr wrap="square" lIns="200000" tIns="170000" rtlCol="0" anchor="ctr"/>
           <a:lstStyle/>
           <a:p>
             <a:pPr algn="ctr"/>
@@ -8379,7 +8230,7 @@
           </a:fontRef>
         </p:style>
         <p:txBody>
-          <a:bodyPr rtlCol="0" anchor="ctr" wrap="square" lIns="200000" tIns="170000"/>
+          <a:bodyPr wrap="square" lIns="200000" tIns="170000" rtlCol="0" anchor="ctr"/>
           <a:lstStyle/>
           <a:p>
             <a:pPr algn="ctr"/>
@@ -8450,7 +8301,7 @@
           </a:fontRef>
         </p:style>
         <p:txBody>
-          <a:bodyPr rtlCol="0" anchor="ctr" wrap="square" lIns="200000" tIns="170000"/>
+          <a:bodyPr wrap="square" lIns="200000" tIns="170000" rtlCol="0" anchor="ctr"/>
           <a:lstStyle/>
           <a:p>
             <a:pPr algn="ctr"/>
@@ -8521,7 +8372,7 @@
           </a:fontRef>
         </p:style>
         <p:txBody>
-          <a:bodyPr rtlCol="0" anchor="ctr" wrap="square" lIns="200000" tIns="170000"/>
+          <a:bodyPr wrap="square" lIns="200000" tIns="170000" rtlCol="0" anchor="ctr"/>
           <a:lstStyle/>
           <a:p>
             <a:pPr algn="ctr"/>
@@ -8892,44 +8743,44 @@
         <a:sysClr val="window" lastClr="FFFFFF"/>
       </a:lt1>
       <a:dk2>
-        <a:srgbClr val="1F497D"/>
+        <a:srgbClr val="44546A"/>
       </a:dk2>
       <a:lt2>
-        <a:srgbClr val="EEECE1"/>
+        <a:srgbClr val="E7E6E6"/>
       </a:lt2>
       <a:accent1>
-        <a:srgbClr val="4F81BD"/>
+        <a:srgbClr val="4472C4"/>
       </a:accent1>
       <a:accent2>
-        <a:srgbClr val="C0504D"/>
+        <a:srgbClr val="ED7D31"/>
       </a:accent2>
       <a:accent3>
-        <a:srgbClr val="9BBB59"/>
+        <a:srgbClr val="A5A5A5"/>
       </a:accent3>
       <a:accent4>
-        <a:srgbClr val="8064A2"/>
+        <a:srgbClr val="FFC000"/>
       </a:accent4>
       <a:accent5>
-        <a:srgbClr val="4BACC6"/>
+        <a:srgbClr val="5B9BD5"/>
       </a:accent5>
       <a:accent6>
-        <a:srgbClr val="F79646"/>
+        <a:srgbClr val="70AD47"/>
       </a:accent6>
       <a:hlink>
-        <a:srgbClr val="0000FF"/>
+        <a:srgbClr val="0563C1"/>
       </a:hlink>
       <a:folHlink>
-        <a:srgbClr val="800080"/>
+        <a:srgbClr val="954F72"/>
       </a:folHlink>
     </a:clrScheme>
     <a:fontScheme name="Office">
       <a:majorFont>
-        <a:latin typeface="Calibri"/>
+        <a:latin typeface="Calibri Light" panose="020F0302020204030204"/>
         <a:ea typeface=""/>
         <a:cs typeface=""/>
-        <a:font script="Jpan" typeface="ＭＳ Ｐゴシック"/>
+        <a:font script="Jpan" typeface="游ゴシック Light"/>
         <a:font script="Hang" typeface="맑은 고딕"/>
-        <a:font script="Hans" typeface="宋体"/>
+        <a:font script="Hans" typeface="等线 Light"/>
         <a:font script="Hant" typeface="新細明體"/>
         <a:font script="Arab" typeface="Times New Roman"/>
         <a:font script="Hebr" typeface="Times New Roman"/>
@@ -8957,14 +8808,31 @@
         <a:font script="Viet" typeface="Times New Roman"/>
         <a:font script="Uigh" typeface="Microsoft Uighur"/>
         <a:font script="Geor" typeface="Sylfaen"/>
+        <a:font script="Armn" typeface="Arial"/>
+        <a:font script="Bugi" typeface="Leelawadee UI"/>
+        <a:font script="Bopo" typeface="Microsoft JhengHei"/>
+        <a:font script="Java" typeface="Javanese Text"/>
+        <a:font script="Lisu" typeface="Segoe UI"/>
+        <a:font script="Mymr" typeface="Myanmar Text"/>
+        <a:font script="Nkoo" typeface="Ebrima"/>
+        <a:font script="Olck" typeface="Nirmala UI"/>
+        <a:font script="Osma" typeface="Ebrima"/>
+        <a:font script="Phag" typeface="Phagspa"/>
+        <a:font script="Syrn" typeface="Estrangelo Edessa"/>
+        <a:font script="Syrj" typeface="Estrangelo Edessa"/>
+        <a:font script="Syre" typeface="Estrangelo Edessa"/>
+        <a:font script="Sora" typeface="Nirmala UI"/>
+        <a:font script="Tale" typeface="Microsoft Tai Le"/>
+        <a:font script="Talu" typeface="Microsoft New Tai Lue"/>
+        <a:font script="Tfng" typeface="Ebrima"/>
       </a:majorFont>
       <a:minorFont>
-        <a:latin typeface="Calibri"/>
+        <a:latin typeface="Calibri" panose="020F0502020204030204"/>
         <a:ea typeface=""/>
         <a:cs typeface=""/>
-        <a:font script="Jpan" typeface="ＭＳ Ｐゴシック"/>
+        <a:font script="Jpan" typeface="游ゴシック"/>
         <a:font script="Hang" typeface="맑은 고딕"/>
-        <a:font script="Hans" typeface="宋体"/>
+        <a:font script="Hans" typeface="等线"/>
         <a:font script="Hant" typeface="新細明體"/>
         <a:font script="Arab" typeface="Arial"/>
         <a:font script="Hebr" typeface="Arial"/>
@@ -8992,6 +8860,23 @@
         <a:font script="Viet" typeface="Arial"/>
         <a:font script="Uigh" typeface="Microsoft Uighur"/>
         <a:font script="Geor" typeface="Sylfaen"/>
+        <a:font script="Armn" typeface="Arial"/>
+        <a:font script="Bugi" typeface="Leelawadee UI"/>
+        <a:font script="Bopo" typeface="Microsoft JhengHei"/>
+        <a:font script="Java" typeface="Javanese Text"/>
+        <a:font script="Lisu" typeface="Segoe UI"/>
+        <a:font script="Mymr" typeface="Myanmar Text"/>
+        <a:font script="Nkoo" typeface="Ebrima"/>
+        <a:font script="Olck" typeface="Nirmala UI"/>
+        <a:font script="Osma" typeface="Ebrima"/>
+        <a:font script="Phag" typeface="Phagspa"/>
+        <a:font script="Syrn" typeface="Estrangelo Edessa"/>
+        <a:font script="Syrj" typeface="Estrangelo Edessa"/>
+        <a:font script="Syre" typeface="Estrangelo Edessa"/>
+        <a:font script="Sora" typeface="Nirmala UI"/>
+        <a:font script="Tale" typeface="Microsoft Tai Le"/>
+        <a:font script="Talu" typeface="Microsoft New Tai Lue"/>
+        <a:font script="Tfng" typeface="Ebrima"/>
       </a:minorFont>
     </a:fontScheme>
     <a:fmtScheme name="Office">
@@ -9003,200 +8888,141 @@
           <a:gsLst>
             <a:gs pos="0">
               <a:schemeClr val="phClr">
-                <a:tint val="50000"/>
-                <a:satMod val="300000"/>
+                <a:lumMod val="110000"/>
+                <a:satMod val="105000"/>
+                <a:tint val="67000"/>
               </a:schemeClr>
             </a:gs>
-            <a:gs pos="35000">
+            <a:gs pos="50000">
               <a:schemeClr val="phClr">
-                <a:tint val="37000"/>
-                <a:satMod val="300000"/>
+                <a:lumMod val="105000"/>
+                <a:satMod val="103000"/>
+                <a:tint val="73000"/>
               </a:schemeClr>
             </a:gs>
             <a:gs pos="100000">
               <a:schemeClr val="phClr">
-                <a:tint val="15000"/>
-                <a:satMod val="350000"/>
+                <a:lumMod val="105000"/>
+                <a:satMod val="109000"/>
+                <a:tint val="81000"/>
               </a:schemeClr>
             </a:gs>
           </a:gsLst>
-          <a:lin ang="16200000" scaled="1"/>
+          <a:lin ang="5400000" scaled="0"/>
         </a:gradFill>
         <a:gradFill rotWithShape="1">
           <a:gsLst>
             <a:gs pos="0">
               <a:schemeClr val="phClr">
-                <a:tint val="100000"/>
+                <a:satMod val="103000"/>
+                <a:lumMod val="102000"/>
+                <a:tint val="94000"/>
+              </a:schemeClr>
+            </a:gs>
+            <a:gs pos="50000">
+              <a:schemeClr val="phClr">
+                <a:satMod val="110000"/>
+                <a:lumMod val="100000"/>
                 <a:shade val="100000"/>
-                <a:satMod val="130000"/>
               </a:schemeClr>
             </a:gs>
             <a:gs pos="100000">
               <a:schemeClr val="phClr">
-                <a:tint val="50000"/>
-                <a:shade val="100000"/>
-                <a:satMod val="350000"/>
+                <a:lumMod val="99000"/>
+                <a:satMod val="120000"/>
+                <a:shade val="78000"/>
               </a:schemeClr>
             </a:gs>
           </a:gsLst>
-          <a:lin ang="16200000" scaled="0"/>
+          <a:lin ang="5400000" scaled="0"/>
         </a:gradFill>
       </a:fillStyleLst>
       <a:lnStyleLst>
-        <a:ln w="9525" cap="flat" cmpd="sng" algn="ctr">
-          <a:solidFill>
-            <a:schemeClr val="phClr">
-              <a:shade val="95000"/>
-              <a:satMod val="105000"/>
-            </a:schemeClr>
-          </a:solidFill>
-          <a:prstDash val="solid"/>
-        </a:ln>
-        <a:ln w="25400" cap="flat" cmpd="sng" algn="ctr">
+        <a:ln w="6350" cap="flat" cmpd="sng" algn="ctr">
           <a:solidFill>
             <a:schemeClr val="phClr"/>
           </a:solidFill>
           <a:prstDash val="solid"/>
+          <a:miter lim="800000"/>
         </a:ln>
-        <a:ln w="38100" cap="flat" cmpd="sng" algn="ctr">
+        <a:ln w="12700" cap="flat" cmpd="sng" algn="ctr">
           <a:solidFill>
             <a:schemeClr val="phClr"/>
           </a:solidFill>
           <a:prstDash val="solid"/>
+          <a:miter lim="800000"/>
+        </a:ln>
+        <a:ln w="19050" cap="flat" cmpd="sng" algn="ctr">
+          <a:solidFill>
+            <a:schemeClr val="phClr"/>
+          </a:solidFill>
+          <a:prstDash val="solid"/>
+          <a:miter lim="800000"/>
         </a:ln>
       </a:lnStyleLst>
       <a:effectStyleLst>
         <a:effectStyle>
+          <a:effectLst/>
+        </a:effectStyle>
+        <a:effectStyle>
+          <a:effectLst/>
+        </a:effectStyle>
+        <a:effectStyle>
           <a:effectLst>
-            <a:outerShdw blurRad="40000" dist="20000" dir="5400000" rotWithShape="0">
+            <a:outerShdw blurRad="57150" dist="19050" dir="5400000" algn="ctr" rotWithShape="0">
               <a:srgbClr val="000000">
-                <a:alpha val="38000"/>
+                <a:alpha val="63000"/>
               </a:srgbClr>
             </a:outerShdw>
           </a:effectLst>
-        </a:effectStyle>
-        <a:effectStyle>
-          <a:effectLst>
-            <a:outerShdw blurRad="40000" dist="23000" dir="5400000" rotWithShape="0">
-              <a:srgbClr val="000000">
-                <a:alpha val="35000"/>
-              </a:srgbClr>
-            </a:outerShdw>
-          </a:effectLst>
-        </a:effectStyle>
-        <a:effectStyle>
-          <a:effectLst>
-            <a:outerShdw blurRad="40000" dist="23000" dir="5400000" rotWithShape="0">
-              <a:srgbClr val="000000">
-                <a:alpha val="35000"/>
-              </a:srgbClr>
-            </a:outerShdw>
-          </a:effectLst>
-          <a:scene3d>
-            <a:camera prst="orthographicFront">
-              <a:rot lat="0" lon="0" rev="0"/>
-            </a:camera>
-            <a:lightRig rig="threePt" dir="t">
-              <a:rot lat="0" lon="0" rev="1200000"/>
-            </a:lightRig>
-          </a:scene3d>
-          <a:sp3d>
-            <a:bevelT w="63500" h="25400"/>
-          </a:sp3d>
         </a:effectStyle>
       </a:effectStyleLst>
       <a:bgFillStyleLst>
         <a:solidFill>
           <a:schemeClr val="phClr"/>
         </a:solidFill>
+        <a:solidFill>
+          <a:schemeClr val="phClr">
+            <a:tint val="95000"/>
+            <a:satMod val="170000"/>
+          </a:schemeClr>
+        </a:solidFill>
         <a:gradFill rotWithShape="1">
           <a:gsLst>
             <a:gs pos="0">
               <a:schemeClr val="phClr">
-                <a:tint val="40000"/>
-                <a:satMod val="350000"/>
+                <a:tint val="93000"/>
+                <a:satMod val="150000"/>
+                <a:shade val="98000"/>
+                <a:lumMod val="102000"/>
               </a:schemeClr>
             </a:gs>
-            <a:gs pos="40000">
+            <a:gs pos="50000">
               <a:schemeClr val="phClr">
-                <a:tint val="45000"/>
-                <a:shade val="99000"/>
-                <a:satMod val="350000"/>
+                <a:tint val="98000"/>
+                <a:satMod val="130000"/>
+                <a:shade val="90000"/>
+                <a:lumMod val="103000"/>
               </a:schemeClr>
             </a:gs>
             <a:gs pos="100000">
               <a:schemeClr val="phClr">
-                <a:shade val="20000"/>
-                <a:satMod val="255000"/>
+                <a:shade val="63000"/>
+                <a:satMod val="120000"/>
               </a:schemeClr>
             </a:gs>
           </a:gsLst>
-          <a:path path="circle">
-            <a:fillToRect l="50000" t="-80000" r="50000" b="180000"/>
-          </a:path>
-        </a:gradFill>
-        <a:gradFill rotWithShape="1">
-          <a:gsLst>
-            <a:gs pos="0">
-              <a:schemeClr val="phClr">
-                <a:tint val="80000"/>
-                <a:satMod val="300000"/>
-              </a:schemeClr>
-            </a:gs>
-            <a:gs pos="100000">
-              <a:schemeClr val="phClr">
-                <a:shade val="30000"/>
-                <a:satMod val="200000"/>
-              </a:schemeClr>
-            </a:gs>
-          </a:gsLst>
-          <a:path path="circle">
-            <a:fillToRect l="50000" t="50000" r="50000" b="50000"/>
-          </a:path>
+          <a:lin ang="5400000" scaled="0"/>
         </a:gradFill>
       </a:bgFillStyleLst>
     </a:fmtScheme>
   </a:themeElements>
-  <a:objectDefaults>
-    <a:spDef>
-      <a:spPr/>
-      <a:bodyPr/>
-      <a:lstStyle/>
-      <a:style>
-        <a:lnRef idx="1">
-          <a:schemeClr val="accent1"/>
-        </a:lnRef>
-        <a:fillRef idx="3">
-          <a:schemeClr val="accent1"/>
-        </a:fillRef>
-        <a:effectRef idx="2">
-          <a:schemeClr val="accent1"/>
-        </a:effectRef>
-        <a:fontRef idx="minor">
-          <a:schemeClr val="lt1"/>
-        </a:fontRef>
-      </a:style>
-    </a:spDef>
-    <a:lnDef>
-      <a:spPr/>
-      <a:bodyPr/>
-      <a:lstStyle/>
-      <a:style>
-        <a:lnRef idx="2">
-          <a:schemeClr val="accent1"/>
-        </a:lnRef>
-        <a:fillRef idx="0">
-          <a:schemeClr val="accent1"/>
-        </a:fillRef>
-        <a:effectRef idx="1">
-          <a:schemeClr val="accent1"/>
-        </a:effectRef>
-        <a:fontRef idx="minor">
-          <a:schemeClr val="tx1"/>
-        </a:fontRef>
-      </a:style>
-    </a:lnDef>
-  </a:objectDefaults>
+  <a:objectDefaults/>
   <a:extraClrSchemeLst/>
+  <a:extLst>
+    <a:ext uri="{05A4C25C-085E-4340-85A3-A5531E510DB2}">
+      <thm15:themeFamily xmlns:thm15="http://schemas.microsoft.com/office/thememl/2012/main" name="Office Theme" id="{62F939B6-93AF-4DB8-9C6B-D6C7DFDC589F}" vid="{4A3C46E8-61CC-4603-A589-7422A47A8E4A}"/>
+    </a:ext>
+  </a:extLst>
 </a:theme>
 </file>